--- a/materials/2026/slides/kcl-frontend-intro.pptx
+++ b/materials/2026/slides/kcl-frontend-intro.pptx
@@ -5376,16 +5376,13 @@
           <a:bodyPr wrap="square" rtlCol="0" anchor="ctr"/>
           <a:lstStyle/>
           <a:p>
-            <a:pPr marL="0" indent="0">
-              <a:buNone/>
-            </a:pPr>
-            <a:r>
-              <a:rPr lang="en-US" sz="2600" b="1" dirty="0">
+            <a:r>
+              <a:rPr lang="ja-JP" altLang="en-US" sz="2600" b="1">
                 <a:solidFill>
                   <a:srgbClr val="0D4F4A"/>
                 </a:solidFill>
               </a:rPr>
-              <a:t>検索 + カテゴリ絞り込み</a:t>
+              <a:t>検索条件と表示結果を分けて管理する</a:t>
             </a:r>
             <a:endParaRPr lang="en-US" sz="2600" dirty="0"/>
           </a:p>
@@ -5592,9 +5589,6 @@
             <a:endParaRPr lang="en-US" sz="1100" dirty="0"/>
           </a:p>
           <a:p>
-            <a:pPr marL="0" indent="0">
-              <a:buNone/>
-            </a:pPr>
             <a:r>
               <a:rPr lang="en-US" sz="1100" dirty="0">
                 <a:solidFill>
@@ -5604,14 +5598,19 @@
                 <a:ea typeface="Courier New" pitchFamily="34" charset="-122"/>
                 <a:cs typeface="Courier New" pitchFamily="34" charset="-120"/>
               </a:rPr>
-              <a:t>// 2つのstateを合わせてfilter</a:t>
-            </a:r>
-            <a:endParaRPr lang="en-US" sz="1100" dirty="0"/>
-          </a:p>
-          <a:p>
-            <a:pPr marL="0" indent="0">
-              <a:buNone/>
-            </a:pPr>
+              <a:t>const [</a:t>
+            </a:r>
+            <a:r>
+              <a:rPr lang="en-US" sz="1100" dirty="0" err="1">
+                <a:solidFill>
+                  <a:srgbClr val="F1F5F9"/>
+                </a:solidFill>
+                <a:latin typeface="Courier New" pitchFamily="34" charset="0"/>
+                <a:ea typeface="Courier New" pitchFamily="34" charset="-122"/>
+                <a:cs typeface="Courier New" pitchFamily="34" charset="-120"/>
+              </a:rPr>
+              <a:t>filteredProducts</a:t>
+            </a:r>
             <a:r>
               <a:rPr lang="en-US" sz="1100" dirty="0">
                 <a:solidFill>
@@ -5621,14 +5620,19 @@
                 <a:ea typeface="Courier New" pitchFamily="34" charset="-122"/>
                 <a:cs typeface="Courier New" pitchFamily="34" charset="-120"/>
               </a:rPr>
-              <a:t>const filtered = filterProducts(</a:t>
-            </a:r>
-            <a:endParaRPr lang="en-US" sz="1100" dirty="0"/>
-          </a:p>
-          <a:p>
-            <a:pPr marL="0" indent="0">
-              <a:buNone/>
-            </a:pPr>
+              <a:t>, </a:t>
+            </a:r>
+            <a:r>
+              <a:rPr lang="en-US" sz="1100" dirty="0" err="1">
+                <a:solidFill>
+                  <a:srgbClr val="F1F5F9"/>
+                </a:solidFill>
+                <a:latin typeface="Courier New" pitchFamily="34" charset="0"/>
+                <a:ea typeface="Courier New" pitchFamily="34" charset="-122"/>
+                <a:cs typeface="Courier New" pitchFamily="34" charset="-120"/>
+              </a:rPr>
+              <a:t>setFilteredProducts</a:t>
+            </a:r>
             <a:r>
               <a:rPr lang="en-US" sz="1100" dirty="0">
                 <a:solidFill>
@@ -5638,14 +5642,10 @@
                 <a:ea typeface="Courier New" pitchFamily="34" charset="-122"/>
                 <a:cs typeface="Courier New" pitchFamily="34" charset="-120"/>
               </a:rPr>
-              <a:t>  products,</a:t>
-            </a:r>
-            <a:endParaRPr lang="en-US" sz="1100" dirty="0"/>
-          </a:p>
-          <a:p>
-            <a:pPr marL="0" indent="0">
-              <a:buNone/>
-            </a:pPr>
+              <a:t>] =</a:t>
+            </a:r>
+          </a:p>
+          <a:p>
             <a:r>
               <a:rPr lang="en-US" sz="1100" dirty="0">
                 <a:solidFill>
@@ -5655,14 +5655,19 @@
                 <a:ea typeface="Courier New" pitchFamily="34" charset="-122"/>
                 <a:cs typeface="Courier New" pitchFamily="34" charset="-120"/>
               </a:rPr>
-              <a:t>  searchTerm,</a:t>
-            </a:r>
-            <a:endParaRPr lang="en-US" sz="1100" dirty="0"/>
-          </a:p>
-          <a:p>
-            <a:pPr marL="0" indent="0">
-              <a:buNone/>
-            </a:pPr>
+              <a:t>  </a:t>
+            </a:r>
+            <a:r>
+              <a:rPr lang="en-US" sz="1100" dirty="0" err="1">
+                <a:solidFill>
+                  <a:srgbClr val="F1F5F9"/>
+                </a:solidFill>
+                <a:latin typeface="Courier New" pitchFamily="34" charset="0"/>
+                <a:ea typeface="Courier New" pitchFamily="34" charset="-122"/>
+                <a:cs typeface="Courier New" pitchFamily="34" charset="-120"/>
+              </a:rPr>
+              <a:t>useState</a:t>
+            </a:r>
             <a:r>
               <a:rPr lang="en-US" sz="1100" dirty="0">
                 <a:solidFill>
@@ -5672,24 +5677,7 @@
                 <a:ea typeface="Courier New" pitchFamily="34" charset="-122"/>
                 <a:cs typeface="Courier New" pitchFamily="34" charset="-120"/>
               </a:rPr>
-              <a:t>  selectedCategory</a:t>
-            </a:r>
-            <a:endParaRPr lang="en-US" sz="1100" dirty="0"/>
-          </a:p>
-          <a:p>
-            <a:pPr marL="0" indent="0">
-              <a:buNone/>
-            </a:pPr>
-            <a:r>
-              <a:rPr lang="en-US" sz="1100" dirty="0">
-                <a:solidFill>
-                  <a:srgbClr val="F1F5F9"/>
-                </a:solidFill>
-                <a:latin typeface="Courier New" pitchFamily="34" charset="0"/>
-                <a:ea typeface="Courier New" pitchFamily="34" charset="-122"/>
-                <a:cs typeface="Courier New" pitchFamily="34" charset="-120"/>
-              </a:rPr>
-              <a:t>);</a:t>
+              <a:t>&lt;Product[]&gt;(products);</a:t>
             </a:r>
             <a:endParaRPr lang="en-US" sz="1100" dirty="0"/>
           </a:p>
@@ -5826,7 +5814,7 @@
               <a:buNone/>
             </a:pPr>
             <a:r>
-              <a:rPr lang="en-US" sz="1100" dirty="0">
+              <a:rPr lang="en-US" sz="900" dirty="0">
                 <a:solidFill>
                   <a:srgbClr val="F1F5F9"/>
                 </a:solidFill>
@@ -5836,48 +5824,129 @@
               </a:rPr>
               <a:t>// src/utils/productFilters.ts</a:t>
             </a:r>
-            <a:endParaRPr lang="en-US" sz="1100" dirty="0"/>
-          </a:p>
-          <a:p>
-            <a:pPr marL="0" indent="0">
-              <a:buNone/>
-            </a:pPr>
-            <a:r>
-              <a:rPr lang="en-US" sz="1100" dirty="0">
-                <a:solidFill>
-                  <a:srgbClr val="F1F5F9"/>
-                </a:solidFill>
-                <a:latin typeface="Courier New" pitchFamily="34" charset="0"/>
-                <a:ea typeface="Courier New" pitchFamily="34" charset="-122"/>
-                <a:cs typeface="Courier New" pitchFamily="34" charset="-120"/>
-              </a:rPr>
-              <a:t>export function filterProducts(</a:t>
-            </a:r>
-            <a:endParaRPr lang="en-US" sz="1100" dirty="0"/>
-          </a:p>
-          <a:p>
-            <a:pPr marL="0" indent="0">
-              <a:buNone/>
-            </a:pPr>
-            <a:r>
-              <a:rPr lang="en-US" sz="1100" dirty="0">
-                <a:solidFill>
-                  <a:srgbClr val="F1F5F9"/>
-                </a:solidFill>
-                <a:latin typeface="Courier New" pitchFamily="34" charset="0"/>
-                <a:ea typeface="Courier New" pitchFamily="34" charset="-122"/>
-                <a:cs typeface="Courier New" pitchFamily="34" charset="-120"/>
-              </a:rPr>
-              <a:t>  products, searchTerm, selectedCategory</a:t>
-            </a:r>
-            <a:endParaRPr lang="en-US" sz="1100" dirty="0"/>
-          </a:p>
-          <a:p>
-            <a:pPr marL="0" indent="0">
-              <a:buNone/>
-            </a:pPr>
-            <a:r>
-              <a:rPr lang="en-US" sz="1100" dirty="0">
+            <a:endParaRPr lang="en-US" sz="900" dirty="0"/>
+          </a:p>
+          <a:p>
+            <a:r>
+              <a:rPr lang="en-US" sz="900" dirty="0">
+                <a:solidFill>
+                  <a:srgbClr val="F1F5F9"/>
+                </a:solidFill>
+                <a:latin typeface="Courier New" pitchFamily="34" charset="0"/>
+                <a:ea typeface="Courier New" pitchFamily="34" charset="-122"/>
+                <a:cs typeface="Courier New" pitchFamily="34" charset="-120"/>
+              </a:rPr>
+              <a:t>export function </a:t>
+            </a:r>
+            <a:r>
+              <a:rPr lang="en-US" sz="900" dirty="0" err="1">
+                <a:solidFill>
+                  <a:srgbClr val="F1F5F9"/>
+                </a:solidFill>
+                <a:latin typeface="Courier New" pitchFamily="34" charset="0"/>
+                <a:ea typeface="Courier New" pitchFamily="34" charset="-122"/>
+                <a:cs typeface="Courier New" pitchFamily="34" charset="-120"/>
+              </a:rPr>
+              <a:t>filterProducts</a:t>
+            </a:r>
+            <a:r>
+              <a:rPr lang="en-US" sz="900" dirty="0">
+                <a:solidFill>
+                  <a:srgbClr val="F1F5F9"/>
+                </a:solidFill>
+                <a:latin typeface="Courier New" pitchFamily="34" charset="0"/>
+                <a:ea typeface="Courier New" pitchFamily="34" charset="-122"/>
+                <a:cs typeface="Courier New" pitchFamily="34" charset="-120"/>
+              </a:rPr>
+              <a:t>(</a:t>
+            </a:r>
+          </a:p>
+          <a:p>
+            <a:r>
+              <a:rPr lang="en-US" sz="900" dirty="0">
+                <a:solidFill>
+                  <a:srgbClr val="F1F5F9"/>
+                </a:solidFill>
+                <a:latin typeface="Courier New" pitchFamily="34" charset="0"/>
+                <a:ea typeface="Courier New" pitchFamily="34" charset="-122"/>
+                <a:cs typeface="Courier New" pitchFamily="34" charset="-120"/>
+              </a:rPr>
+              <a:t>  products: Product[],</a:t>
+            </a:r>
+          </a:p>
+          <a:p>
+            <a:r>
+              <a:rPr lang="en-US" sz="900" dirty="0">
+                <a:solidFill>
+                  <a:srgbClr val="F1F5F9"/>
+                </a:solidFill>
+                <a:latin typeface="Courier New" pitchFamily="34" charset="0"/>
+                <a:ea typeface="Courier New" pitchFamily="34" charset="-122"/>
+                <a:cs typeface="Courier New" pitchFamily="34" charset="-120"/>
+              </a:rPr>
+              <a:t>  </a:t>
+            </a:r>
+            <a:r>
+              <a:rPr lang="en-US" sz="900" dirty="0" err="1">
+                <a:solidFill>
+                  <a:srgbClr val="F1F5F9"/>
+                </a:solidFill>
+                <a:latin typeface="Courier New" pitchFamily="34" charset="0"/>
+                <a:ea typeface="Courier New" pitchFamily="34" charset="-122"/>
+                <a:cs typeface="Courier New" pitchFamily="34" charset="-120"/>
+              </a:rPr>
+              <a:t>searchTerm</a:t>
+            </a:r>
+            <a:r>
+              <a:rPr lang="en-US" sz="900" dirty="0">
+                <a:solidFill>
+                  <a:srgbClr val="F1F5F9"/>
+                </a:solidFill>
+                <a:latin typeface="Courier New" pitchFamily="34" charset="0"/>
+                <a:ea typeface="Courier New" pitchFamily="34" charset="-122"/>
+                <a:cs typeface="Courier New" pitchFamily="34" charset="-120"/>
+              </a:rPr>
+              <a:t>: string,</a:t>
+            </a:r>
+          </a:p>
+          <a:p>
+            <a:r>
+              <a:rPr lang="en-US" sz="900" dirty="0">
+                <a:solidFill>
+                  <a:srgbClr val="F1F5F9"/>
+                </a:solidFill>
+                <a:latin typeface="Courier New" pitchFamily="34" charset="0"/>
+                <a:ea typeface="Courier New" pitchFamily="34" charset="-122"/>
+                <a:cs typeface="Courier New" pitchFamily="34" charset="-120"/>
+              </a:rPr>
+              <a:t>  </a:t>
+            </a:r>
+            <a:r>
+              <a:rPr lang="en-US" sz="900" dirty="0" err="1">
+                <a:solidFill>
+                  <a:srgbClr val="F1F5F9"/>
+                </a:solidFill>
+                <a:latin typeface="Courier New" pitchFamily="34" charset="0"/>
+                <a:ea typeface="Courier New" pitchFamily="34" charset="-122"/>
+                <a:cs typeface="Courier New" pitchFamily="34" charset="-120"/>
+              </a:rPr>
+              <a:t>selectedCategory</a:t>
+            </a:r>
+            <a:r>
+              <a:rPr lang="en-US" sz="900" dirty="0">
+                <a:solidFill>
+                  <a:srgbClr val="F1F5F9"/>
+                </a:solidFill>
+                <a:latin typeface="Courier New" pitchFamily="34" charset="0"/>
+                <a:ea typeface="Courier New" pitchFamily="34" charset="-122"/>
+                <a:cs typeface="Courier New" pitchFamily="34" charset="-120"/>
+              </a:rPr>
+              <a:t>: string,</a:t>
+            </a:r>
+          </a:p>
+          <a:p>
+            <a:r>
+              <a:rPr lang="en-US" sz="900" dirty="0">
                 <a:solidFill>
                   <a:srgbClr val="F1F5F9"/>
                 </a:solidFill>
@@ -5887,133 +5956,420 @@
               </a:rPr>
               <a:t>) {</a:t>
             </a:r>
-            <a:endParaRPr lang="en-US" sz="1100" dirty="0"/>
-          </a:p>
-          <a:p>
-            <a:pPr marL="0" indent="0">
-              <a:buNone/>
-            </a:pPr>
-            <a:r>
-              <a:rPr lang="en-US" sz="1100" dirty="0">
-                <a:solidFill>
-                  <a:srgbClr val="F1F5F9"/>
-                </a:solidFill>
-                <a:latin typeface="Courier New" pitchFamily="34" charset="0"/>
-                <a:ea typeface="Courier New" pitchFamily="34" charset="-122"/>
-                <a:cs typeface="Courier New" pitchFamily="34" charset="-120"/>
-              </a:rPr>
-              <a:t>  return products.filter((product) =&gt; {</a:t>
-            </a:r>
-            <a:endParaRPr lang="en-US" sz="1100" dirty="0"/>
-          </a:p>
-          <a:p>
-            <a:pPr marL="0" indent="0">
-              <a:buNone/>
-            </a:pPr>
-            <a:r>
-              <a:rPr lang="en-US" sz="1100" dirty="0">
-                <a:solidFill>
-                  <a:srgbClr val="F1F5F9"/>
-                </a:solidFill>
-                <a:latin typeface="Courier New" pitchFamily="34" charset="0"/>
-                <a:ea typeface="Courier New" pitchFamily="34" charset="-122"/>
-                <a:cs typeface="Courier New" pitchFamily="34" charset="-120"/>
-              </a:rPr>
-              <a:t>    const matchesSearch =</a:t>
-            </a:r>
-            <a:endParaRPr lang="en-US" sz="1100" dirty="0"/>
-          </a:p>
-          <a:p>
-            <a:pPr marL="0" indent="0">
-              <a:buNone/>
-            </a:pPr>
-            <a:r>
-              <a:rPr lang="en-US" sz="1100" dirty="0">
-                <a:solidFill>
-                  <a:srgbClr val="F1F5F9"/>
-                </a:solidFill>
-                <a:latin typeface="Courier New" pitchFamily="34" charset="0"/>
-                <a:ea typeface="Courier New" pitchFamily="34" charset="-122"/>
-                <a:cs typeface="Courier New" pitchFamily="34" charset="-120"/>
-              </a:rPr>
-              <a:t>      product.name.includes(searchTerm);</a:t>
-            </a:r>
-            <a:endParaRPr lang="en-US" sz="1100" dirty="0"/>
-          </a:p>
-          <a:p>
-            <a:pPr marL="0" indent="0">
-              <a:buNone/>
-            </a:pPr>
-            <a:r>
-              <a:rPr lang="en-US" sz="1100" dirty="0">
-                <a:solidFill>
-                  <a:srgbClr val="F1F5F9"/>
-                </a:solidFill>
-                <a:latin typeface="Courier New" pitchFamily="34" charset="0"/>
-                <a:ea typeface="Courier New" pitchFamily="34" charset="-122"/>
-                <a:cs typeface="Courier New" pitchFamily="34" charset="-120"/>
-              </a:rPr>
-              <a:t>    const matchesCategory =</a:t>
-            </a:r>
-            <a:endParaRPr lang="en-US" sz="1100" dirty="0"/>
-          </a:p>
-          <a:p>
-            <a:pPr marL="0" indent="0">
-              <a:buNone/>
-            </a:pPr>
-            <a:r>
-              <a:rPr lang="en-US" sz="1100" dirty="0">
-                <a:solidFill>
-                  <a:srgbClr val="F1F5F9"/>
-                </a:solidFill>
-                <a:latin typeface="Courier New" pitchFamily="34" charset="0"/>
-                <a:ea typeface="Courier New" pitchFamily="34" charset="-122"/>
-                <a:cs typeface="Courier New" pitchFamily="34" charset="-120"/>
-              </a:rPr>
-              <a:t>      selectedCategory === "すべて" ||</a:t>
-            </a:r>
-            <a:endParaRPr lang="en-US" sz="1100" dirty="0"/>
-          </a:p>
-          <a:p>
-            <a:pPr marL="0" indent="0">
-              <a:buNone/>
-            </a:pPr>
-            <a:r>
-              <a:rPr lang="en-US" sz="1100" dirty="0">
-                <a:solidFill>
-                  <a:srgbClr val="F1F5F9"/>
-                </a:solidFill>
-                <a:latin typeface="Courier New" pitchFamily="34" charset="0"/>
-                <a:ea typeface="Courier New" pitchFamily="34" charset="-122"/>
-                <a:cs typeface="Courier New" pitchFamily="34" charset="-120"/>
-              </a:rPr>
-              <a:t>      product.category === selectedCategory;</a:t>
-            </a:r>
-            <a:endParaRPr lang="en-US" sz="1100" dirty="0"/>
-          </a:p>
-          <a:p>
-            <a:pPr marL="0" indent="0">
-              <a:buNone/>
-            </a:pPr>
-            <a:r>
-              <a:rPr lang="en-US" sz="1100" dirty="0">
-                <a:solidFill>
-                  <a:srgbClr val="F1F5F9"/>
-                </a:solidFill>
-                <a:latin typeface="Courier New" pitchFamily="34" charset="0"/>
-                <a:ea typeface="Courier New" pitchFamily="34" charset="-122"/>
-                <a:cs typeface="Courier New" pitchFamily="34" charset="-120"/>
-              </a:rPr>
-              <a:t>    return matchesSearch &amp;&amp; matchesCategory;</a:t>
-            </a:r>
-            <a:endParaRPr lang="en-US" sz="1100" dirty="0"/>
-          </a:p>
-          <a:p>
-            <a:pPr marL="0" indent="0">
-              <a:buNone/>
-            </a:pPr>
-            <a:r>
-              <a:rPr lang="en-US" sz="1100" dirty="0">
+          </a:p>
+          <a:p>
+            <a:r>
+              <a:rPr lang="en-US" sz="900" dirty="0">
+                <a:solidFill>
+                  <a:srgbClr val="F1F5F9"/>
+                </a:solidFill>
+                <a:latin typeface="Courier New" pitchFamily="34" charset="0"/>
+                <a:ea typeface="Courier New" pitchFamily="34" charset="-122"/>
+                <a:cs typeface="Courier New" pitchFamily="34" charset="-120"/>
+              </a:rPr>
+              <a:t>  return </a:t>
+            </a:r>
+            <a:r>
+              <a:rPr lang="en-US" sz="900" dirty="0" err="1">
+                <a:solidFill>
+                  <a:srgbClr val="F1F5F9"/>
+                </a:solidFill>
+                <a:latin typeface="Courier New" pitchFamily="34" charset="0"/>
+                <a:ea typeface="Courier New" pitchFamily="34" charset="-122"/>
+                <a:cs typeface="Courier New" pitchFamily="34" charset="-120"/>
+              </a:rPr>
+              <a:t>products.filter</a:t>
+            </a:r>
+            <a:r>
+              <a:rPr lang="en-US" sz="900" dirty="0">
+                <a:solidFill>
+                  <a:srgbClr val="F1F5F9"/>
+                </a:solidFill>
+                <a:latin typeface="Courier New" pitchFamily="34" charset="0"/>
+                <a:ea typeface="Courier New" pitchFamily="34" charset="-122"/>
+                <a:cs typeface="Courier New" pitchFamily="34" charset="-120"/>
+              </a:rPr>
+              <a:t>((product) =&gt; {</a:t>
+            </a:r>
+          </a:p>
+          <a:p>
+            <a:r>
+              <a:rPr lang="en-US" sz="900" dirty="0">
+                <a:solidFill>
+                  <a:srgbClr val="F1F5F9"/>
+                </a:solidFill>
+                <a:latin typeface="Courier New" pitchFamily="34" charset="0"/>
+                <a:ea typeface="Courier New" pitchFamily="34" charset="-122"/>
+                <a:cs typeface="Courier New" pitchFamily="34" charset="-120"/>
+              </a:rPr>
+              <a:t>    const </a:t>
+            </a:r>
+            <a:r>
+              <a:rPr lang="en-US" sz="900" dirty="0" err="1">
+                <a:solidFill>
+                  <a:srgbClr val="F1F5F9"/>
+                </a:solidFill>
+                <a:latin typeface="Courier New" pitchFamily="34" charset="0"/>
+                <a:ea typeface="Courier New" pitchFamily="34" charset="-122"/>
+                <a:cs typeface="Courier New" pitchFamily="34" charset="-120"/>
+              </a:rPr>
+              <a:t>matchesSearch</a:t>
+            </a:r>
+            <a:r>
+              <a:rPr lang="en-US" sz="900" dirty="0">
+                <a:solidFill>
+                  <a:srgbClr val="F1F5F9"/>
+                </a:solidFill>
+                <a:latin typeface="Courier New" pitchFamily="34" charset="0"/>
+                <a:ea typeface="Courier New" pitchFamily="34" charset="-122"/>
+                <a:cs typeface="Courier New" pitchFamily="34" charset="-120"/>
+              </a:rPr>
+              <a:t> =</a:t>
+            </a:r>
+          </a:p>
+          <a:p>
+            <a:r>
+              <a:rPr lang="en-US" sz="900" dirty="0">
+                <a:solidFill>
+                  <a:srgbClr val="F1F5F9"/>
+                </a:solidFill>
+                <a:latin typeface="Courier New" pitchFamily="34" charset="0"/>
+                <a:ea typeface="Courier New" pitchFamily="34" charset="-122"/>
+                <a:cs typeface="Courier New" pitchFamily="34" charset="-120"/>
+              </a:rPr>
+              <a:t>      </a:t>
+            </a:r>
+            <a:r>
+              <a:rPr lang="en-US" sz="900" dirty="0" err="1">
+                <a:solidFill>
+                  <a:srgbClr val="F1F5F9"/>
+                </a:solidFill>
+                <a:latin typeface="Courier New" pitchFamily="34" charset="0"/>
+                <a:ea typeface="Courier New" pitchFamily="34" charset="-122"/>
+                <a:cs typeface="Courier New" pitchFamily="34" charset="-120"/>
+              </a:rPr>
+              <a:t>product.name.includes</a:t>
+            </a:r>
+            <a:r>
+              <a:rPr lang="en-US" sz="900" dirty="0">
+                <a:solidFill>
+                  <a:srgbClr val="F1F5F9"/>
+                </a:solidFill>
+                <a:latin typeface="Courier New" pitchFamily="34" charset="0"/>
+                <a:ea typeface="Courier New" pitchFamily="34" charset="-122"/>
+                <a:cs typeface="Courier New" pitchFamily="34" charset="-120"/>
+              </a:rPr>
+              <a:t>(</a:t>
+            </a:r>
+            <a:r>
+              <a:rPr lang="en-US" sz="900" dirty="0" err="1">
+                <a:solidFill>
+                  <a:srgbClr val="F1F5F9"/>
+                </a:solidFill>
+                <a:latin typeface="Courier New" pitchFamily="34" charset="0"/>
+                <a:ea typeface="Courier New" pitchFamily="34" charset="-122"/>
+                <a:cs typeface="Courier New" pitchFamily="34" charset="-120"/>
+              </a:rPr>
+              <a:t>searchTerm</a:t>
+            </a:r>
+            <a:r>
+              <a:rPr lang="en-US" sz="900" dirty="0">
+                <a:solidFill>
+                  <a:srgbClr val="F1F5F9"/>
+                </a:solidFill>
+                <a:latin typeface="Courier New" pitchFamily="34" charset="0"/>
+                <a:ea typeface="Courier New" pitchFamily="34" charset="-122"/>
+                <a:cs typeface="Courier New" pitchFamily="34" charset="-120"/>
+              </a:rPr>
+              <a:t>) ||</a:t>
+            </a:r>
+          </a:p>
+          <a:p>
+            <a:r>
+              <a:rPr lang="en-US" sz="900" dirty="0">
+                <a:solidFill>
+                  <a:srgbClr val="F1F5F9"/>
+                </a:solidFill>
+                <a:latin typeface="Courier New" pitchFamily="34" charset="0"/>
+                <a:ea typeface="Courier New" pitchFamily="34" charset="-122"/>
+                <a:cs typeface="Courier New" pitchFamily="34" charset="-120"/>
+              </a:rPr>
+              <a:t>      </a:t>
+            </a:r>
+            <a:r>
+              <a:rPr lang="en-US" sz="900" dirty="0" err="1">
+                <a:solidFill>
+                  <a:srgbClr val="F1F5F9"/>
+                </a:solidFill>
+                <a:latin typeface="Courier New" pitchFamily="34" charset="0"/>
+                <a:ea typeface="Courier New" pitchFamily="34" charset="-122"/>
+                <a:cs typeface="Courier New" pitchFamily="34" charset="-120"/>
+              </a:rPr>
+              <a:t>product.description.includes</a:t>
+            </a:r>
+            <a:r>
+              <a:rPr lang="en-US" sz="900" dirty="0">
+                <a:solidFill>
+                  <a:srgbClr val="F1F5F9"/>
+                </a:solidFill>
+                <a:latin typeface="Courier New" pitchFamily="34" charset="0"/>
+                <a:ea typeface="Courier New" pitchFamily="34" charset="-122"/>
+                <a:cs typeface="Courier New" pitchFamily="34" charset="-120"/>
+              </a:rPr>
+              <a:t>(</a:t>
+            </a:r>
+            <a:r>
+              <a:rPr lang="en-US" sz="900" dirty="0" err="1">
+                <a:solidFill>
+                  <a:srgbClr val="F1F5F9"/>
+                </a:solidFill>
+                <a:latin typeface="Courier New" pitchFamily="34" charset="0"/>
+                <a:ea typeface="Courier New" pitchFamily="34" charset="-122"/>
+                <a:cs typeface="Courier New" pitchFamily="34" charset="-120"/>
+              </a:rPr>
+              <a:t>searchTerm</a:t>
+            </a:r>
+            <a:r>
+              <a:rPr lang="en-US" sz="900" dirty="0">
+                <a:solidFill>
+                  <a:srgbClr val="F1F5F9"/>
+                </a:solidFill>
+                <a:latin typeface="Courier New" pitchFamily="34" charset="0"/>
+                <a:ea typeface="Courier New" pitchFamily="34" charset="-122"/>
+                <a:cs typeface="Courier New" pitchFamily="34" charset="-120"/>
+              </a:rPr>
+              <a:t>);</a:t>
+            </a:r>
+          </a:p>
+          <a:p>
+            <a:endParaRPr lang="en-US" sz="900" dirty="0">
+              <a:solidFill>
+                <a:srgbClr val="F1F5F9"/>
+              </a:solidFill>
+              <a:latin typeface="Courier New" pitchFamily="34" charset="0"/>
+              <a:ea typeface="Courier New" pitchFamily="34" charset="-122"/>
+              <a:cs typeface="Courier New" pitchFamily="34" charset="-120"/>
+            </a:endParaRPr>
+          </a:p>
+          <a:p>
+            <a:r>
+              <a:rPr lang="en-US" sz="900" dirty="0">
+                <a:solidFill>
+                  <a:srgbClr val="F1F5F9"/>
+                </a:solidFill>
+                <a:latin typeface="Courier New" pitchFamily="34" charset="0"/>
+                <a:ea typeface="Courier New" pitchFamily="34" charset="-122"/>
+                <a:cs typeface="Courier New" pitchFamily="34" charset="-120"/>
+              </a:rPr>
+              <a:t>    const </a:t>
+            </a:r>
+            <a:r>
+              <a:rPr lang="en-US" sz="900" dirty="0" err="1">
+                <a:solidFill>
+                  <a:srgbClr val="F1F5F9"/>
+                </a:solidFill>
+                <a:latin typeface="Courier New" pitchFamily="34" charset="0"/>
+                <a:ea typeface="Courier New" pitchFamily="34" charset="-122"/>
+                <a:cs typeface="Courier New" pitchFamily="34" charset="-120"/>
+              </a:rPr>
+              <a:t>matchesCategory</a:t>
+            </a:r>
+            <a:r>
+              <a:rPr lang="en-US" sz="900" dirty="0">
+                <a:solidFill>
+                  <a:srgbClr val="F1F5F9"/>
+                </a:solidFill>
+                <a:latin typeface="Courier New" pitchFamily="34" charset="0"/>
+                <a:ea typeface="Courier New" pitchFamily="34" charset="-122"/>
+                <a:cs typeface="Courier New" pitchFamily="34" charset="-120"/>
+              </a:rPr>
+              <a:t> =</a:t>
+            </a:r>
+          </a:p>
+          <a:p>
+            <a:r>
+              <a:rPr lang="en-US" sz="900" dirty="0">
+                <a:solidFill>
+                  <a:srgbClr val="F1F5F9"/>
+                </a:solidFill>
+                <a:latin typeface="Courier New" pitchFamily="34" charset="0"/>
+                <a:ea typeface="Courier New" pitchFamily="34" charset="-122"/>
+                <a:cs typeface="Courier New" pitchFamily="34" charset="-120"/>
+              </a:rPr>
+              <a:t>      </a:t>
+            </a:r>
+            <a:r>
+              <a:rPr lang="en-US" sz="900" dirty="0" err="1">
+                <a:solidFill>
+                  <a:srgbClr val="F1F5F9"/>
+                </a:solidFill>
+                <a:latin typeface="Courier New" pitchFamily="34" charset="0"/>
+                <a:ea typeface="Courier New" pitchFamily="34" charset="-122"/>
+                <a:cs typeface="Courier New" pitchFamily="34" charset="-120"/>
+              </a:rPr>
+              <a:t>selectedCategory</a:t>
+            </a:r>
+            <a:r>
+              <a:rPr lang="en-US" sz="900" dirty="0">
+                <a:solidFill>
+                  <a:srgbClr val="F1F5F9"/>
+                </a:solidFill>
+                <a:latin typeface="Courier New" pitchFamily="34" charset="0"/>
+                <a:ea typeface="Courier New" pitchFamily="34" charset="-122"/>
+                <a:cs typeface="Courier New" pitchFamily="34" charset="-120"/>
+              </a:rPr>
+              <a:t> === "</a:t>
+            </a:r>
+            <a:r>
+              <a:rPr lang="ja-JP" altLang="en-US" sz="900">
+                <a:solidFill>
+                  <a:srgbClr val="F1F5F9"/>
+                </a:solidFill>
+                <a:latin typeface="Courier New" pitchFamily="34" charset="0"/>
+                <a:ea typeface="Courier New" pitchFamily="34" charset="-122"/>
+                <a:cs typeface="Courier New" pitchFamily="34" charset="-120"/>
+              </a:rPr>
+              <a:t>すべて</a:t>
+            </a:r>
+            <a:r>
+              <a:rPr lang="en-US" altLang="ja-JP" sz="900" dirty="0">
+                <a:solidFill>
+                  <a:srgbClr val="F1F5F9"/>
+                </a:solidFill>
+                <a:latin typeface="Courier New" pitchFamily="34" charset="0"/>
+                <a:ea typeface="Courier New" pitchFamily="34" charset="-122"/>
+                <a:cs typeface="Courier New" pitchFamily="34" charset="-120"/>
+              </a:rPr>
+              <a:t>" ||</a:t>
+            </a:r>
+          </a:p>
+          <a:p>
+            <a:r>
+              <a:rPr lang="en-US" altLang="ja-JP" sz="900" dirty="0">
+                <a:solidFill>
+                  <a:srgbClr val="F1F5F9"/>
+                </a:solidFill>
+                <a:latin typeface="Courier New" pitchFamily="34" charset="0"/>
+                <a:ea typeface="Courier New" pitchFamily="34" charset="-122"/>
+                <a:cs typeface="Courier New" pitchFamily="34" charset="-120"/>
+              </a:rPr>
+              <a:t>      </a:t>
+            </a:r>
+            <a:r>
+              <a:rPr lang="en-US" sz="900" dirty="0" err="1">
+                <a:solidFill>
+                  <a:srgbClr val="F1F5F9"/>
+                </a:solidFill>
+                <a:latin typeface="Courier New" pitchFamily="34" charset="0"/>
+                <a:ea typeface="Courier New" pitchFamily="34" charset="-122"/>
+                <a:cs typeface="Courier New" pitchFamily="34" charset="-120"/>
+              </a:rPr>
+              <a:t>product.category</a:t>
+            </a:r>
+            <a:r>
+              <a:rPr lang="en-US" sz="900" dirty="0">
+                <a:solidFill>
+                  <a:srgbClr val="F1F5F9"/>
+                </a:solidFill>
+                <a:latin typeface="Courier New" pitchFamily="34" charset="0"/>
+                <a:ea typeface="Courier New" pitchFamily="34" charset="-122"/>
+                <a:cs typeface="Courier New" pitchFamily="34" charset="-120"/>
+              </a:rPr>
+              <a:t> === </a:t>
+            </a:r>
+            <a:r>
+              <a:rPr lang="en-US" sz="900" dirty="0" err="1">
+                <a:solidFill>
+                  <a:srgbClr val="F1F5F9"/>
+                </a:solidFill>
+                <a:latin typeface="Courier New" pitchFamily="34" charset="0"/>
+                <a:ea typeface="Courier New" pitchFamily="34" charset="-122"/>
+                <a:cs typeface="Courier New" pitchFamily="34" charset="-120"/>
+              </a:rPr>
+              <a:t>selectedCategory</a:t>
+            </a:r>
+            <a:r>
+              <a:rPr lang="en-US" sz="900" dirty="0">
+                <a:solidFill>
+                  <a:srgbClr val="F1F5F9"/>
+                </a:solidFill>
+                <a:latin typeface="Courier New" pitchFamily="34" charset="0"/>
+                <a:ea typeface="Courier New" pitchFamily="34" charset="-122"/>
+                <a:cs typeface="Courier New" pitchFamily="34" charset="-120"/>
+              </a:rPr>
+              <a:t>;</a:t>
+            </a:r>
+          </a:p>
+          <a:p>
+            <a:endParaRPr lang="en-US" sz="900" dirty="0">
+              <a:solidFill>
+                <a:srgbClr val="F1F5F9"/>
+              </a:solidFill>
+              <a:latin typeface="Courier New" pitchFamily="34" charset="0"/>
+              <a:ea typeface="Courier New" pitchFamily="34" charset="-122"/>
+              <a:cs typeface="Courier New" pitchFamily="34" charset="-120"/>
+            </a:endParaRPr>
+          </a:p>
+          <a:p>
+            <a:r>
+              <a:rPr lang="en-US" sz="900" dirty="0">
+                <a:solidFill>
+                  <a:srgbClr val="F1F5F9"/>
+                </a:solidFill>
+                <a:latin typeface="Courier New" pitchFamily="34" charset="0"/>
+                <a:ea typeface="Courier New" pitchFamily="34" charset="-122"/>
+                <a:cs typeface="Courier New" pitchFamily="34" charset="-120"/>
+              </a:rPr>
+              <a:t>    return </a:t>
+            </a:r>
+            <a:r>
+              <a:rPr lang="en-US" sz="900" dirty="0" err="1">
+                <a:solidFill>
+                  <a:srgbClr val="F1F5F9"/>
+                </a:solidFill>
+                <a:latin typeface="Courier New" pitchFamily="34" charset="0"/>
+                <a:ea typeface="Courier New" pitchFamily="34" charset="-122"/>
+                <a:cs typeface="Courier New" pitchFamily="34" charset="-120"/>
+              </a:rPr>
+              <a:t>matchesSearch</a:t>
+            </a:r>
+            <a:r>
+              <a:rPr lang="en-US" sz="900" dirty="0">
+                <a:solidFill>
+                  <a:srgbClr val="F1F5F9"/>
+                </a:solidFill>
+                <a:latin typeface="Courier New" pitchFamily="34" charset="0"/>
+                <a:ea typeface="Courier New" pitchFamily="34" charset="-122"/>
+                <a:cs typeface="Courier New" pitchFamily="34" charset="-120"/>
+              </a:rPr>
+              <a:t> &amp;&amp; </a:t>
+            </a:r>
+            <a:r>
+              <a:rPr lang="en-US" sz="900" dirty="0" err="1">
+                <a:solidFill>
+                  <a:srgbClr val="F1F5F9"/>
+                </a:solidFill>
+                <a:latin typeface="Courier New" pitchFamily="34" charset="0"/>
+                <a:ea typeface="Courier New" pitchFamily="34" charset="-122"/>
+                <a:cs typeface="Courier New" pitchFamily="34" charset="-120"/>
+              </a:rPr>
+              <a:t>matchesCategory</a:t>
+            </a:r>
+            <a:r>
+              <a:rPr lang="en-US" sz="900" dirty="0">
+                <a:solidFill>
+                  <a:srgbClr val="F1F5F9"/>
+                </a:solidFill>
+                <a:latin typeface="Courier New" pitchFamily="34" charset="0"/>
+                <a:ea typeface="Courier New" pitchFamily="34" charset="-122"/>
+                <a:cs typeface="Courier New" pitchFamily="34" charset="-120"/>
+              </a:rPr>
+              <a:t>;</a:t>
+            </a:r>
+          </a:p>
+          <a:p>
+            <a:r>
+              <a:rPr lang="en-US" sz="900" dirty="0">
                 <a:solidFill>
                   <a:srgbClr val="F1F5F9"/>
                 </a:solidFill>
@@ -6023,14 +6379,10 @@
               </a:rPr>
               <a:t>  });</a:t>
             </a:r>
-            <a:endParaRPr lang="en-US" sz="1100" dirty="0"/>
-          </a:p>
-          <a:p>
-            <a:pPr marL="0" indent="0">
-              <a:buNone/>
-            </a:pPr>
-            <a:r>
-              <a:rPr lang="en-US" sz="1100" dirty="0">
+          </a:p>
+          <a:p>
+            <a:r>
+              <a:rPr lang="en-US" sz="900" dirty="0">
                 <a:solidFill>
                   <a:srgbClr val="F1F5F9"/>
                 </a:solidFill>
@@ -6040,7 +6392,7 @@
               </a:rPr>
               <a:t>}</a:t>
             </a:r>
-            <a:endParaRPr lang="en-US" sz="1100" dirty="0"/>
+            <a:endParaRPr lang="en-US" sz="900" dirty="0"/>
           </a:p>
         </p:txBody>
       </p:sp>
@@ -10260,7 +10612,7 @@
           <a:lstStyle/>
           <a:p>
             <a:r>
-              <a:rPr lang="en-US" sz="800" dirty="0">
+              <a:rPr lang="en-US" sz="900" dirty="0">
                 <a:solidFill>
                   <a:srgbClr val="F1F5F9"/>
                 </a:solidFill>
@@ -10271,7 +10623,7 @@
               <a:t>// </a:t>
             </a:r>
             <a:r>
-              <a:rPr lang="en-US" sz="800" dirty="0" err="1">
+              <a:rPr lang="en-US" sz="900" dirty="0" err="1">
                 <a:solidFill>
                   <a:srgbClr val="F1F5F9"/>
                 </a:solidFill>
@@ -10282,7 +10634,7 @@
               <a:t>src</a:t>
             </a:r>
             <a:r>
-              <a:rPr lang="en-US" sz="800" dirty="0">
+              <a:rPr lang="en-US" sz="900" dirty="0">
                 <a:solidFill>
                   <a:srgbClr val="F1F5F9"/>
                 </a:solidFill>
@@ -10293,7 +10645,7 @@
               <a:t>/app/products/[id]/</a:t>
             </a:r>
             <a:r>
-              <a:rPr lang="en-US" sz="800" dirty="0" err="1">
+              <a:rPr lang="en-US" sz="900" dirty="0" err="1">
                 <a:solidFill>
                   <a:srgbClr val="F1F5F9"/>
                 </a:solidFill>
@@ -10303,7 +10655,7 @@
               </a:rPr>
               <a:t>page.tsx</a:t>
             </a:r>
-            <a:endParaRPr lang="en-US" sz="800" dirty="0">
+            <a:endParaRPr lang="en-US" sz="900" dirty="0">
               <a:solidFill>
                 <a:srgbClr val="F1F5F9"/>
               </a:solidFill>
@@ -10313,7 +10665,7 @@
             </a:endParaRPr>
           </a:p>
           <a:p>
-            <a:endParaRPr lang="en-US" sz="800" dirty="0">
+            <a:endParaRPr lang="en-US" sz="900" dirty="0">
               <a:solidFill>
                 <a:srgbClr val="F1F5F9"/>
               </a:solidFill>
@@ -10324,54 +10676,93 @@
           </a:p>
           <a:p>
             <a:r>
-              <a:rPr lang="en-US" sz="800" dirty="0">
-                <a:solidFill>
-                  <a:srgbClr val="F1F5F9"/>
-                </a:solidFill>
-                <a:latin typeface="Courier New" pitchFamily="34" charset="0"/>
-                <a:ea typeface="Courier New" pitchFamily="34" charset="-122"/>
-                <a:cs typeface="Courier New" pitchFamily="34" charset="-120"/>
-              </a:rPr>
-              <a:t>import { </a:t>
-            </a:r>
-            <a:r>
-              <a:rPr lang="en-US" sz="800" dirty="0" err="1">
-                <a:solidFill>
-                  <a:srgbClr val="F1F5F9"/>
-                </a:solidFill>
-                <a:latin typeface="Courier New" pitchFamily="34" charset="0"/>
-                <a:ea typeface="Courier New" pitchFamily="34" charset="-122"/>
-                <a:cs typeface="Courier New" pitchFamily="34" charset="-120"/>
-              </a:rPr>
-              <a:t>notFound</a:t>
-            </a:r>
-            <a:r>
-              <a:rPr lang="en-US" sz="800" dirty="0">
-                <a:solidFill>
-                  <a:srgbClr val="F1F5F9"/>
-                </a:solidFill>
-                <a:latin typeface="Courier New" pitchFamily="34" charset="0"/>
-                <a:ea typeface="Courier New" pitchFamily="34" charset="-122"/>
-                <a:cs typeface="Courier New" pitchFamily="34" charset="-120"/>
-              </a:rPr>
-              <a:t> } from "next/navigation";</a:t>
-            </a:r>
-          </a:p>
-          <a:p>
-            <a:r>
-              <a:rPr lang="en-US" sz="800" dirty="0">
-                <a:solidFill>
-                  <a:srgbClr val="F1F5F9"/>
-                </a:solidFill>
-                <a:latin typeface="Courier New" pitchFamily="34" charset="0"/>
-                <a:ea typeface="Courier New" pitchFamily="34" charset="-122"/>
-                <a:cs typeface="Courier New" pitchFamily="34" charset="-120"/>
-              </a:rPr>
-              <a:t>import { products } from "@/data/products";</a:t>
-            </a:r>
-          </a:p>
-          <a:p>
-            <a:endParaRPr lang="en-US" sz="800" dirty="0">
+              <a:rPr lang="en-US" sz="900" dirty="0">
+                <a:solidFill>
+                  <a:srgbClr val="F1F5F9"/>
+                </a:solidFill>
+                <a:latin typeface="Courier New" pitchFamily="34" charset="0"/>
+                <a:ea typeface="Courier New" pitchFamily="34" charset="-122"/>
+                <a:cs typeface="Courier New" pitchFamily="34" charset="-120"/>
+              </a:rPr>
+              <a:t>type </a:t>
+            </a:r>
+            <a:r>
+              <a:rPr lang="en-US" sz="900" dirty="0" err="1">
+                <a:solidFill>
+                  <a:srgbClr val="F1F5F9"/>
+                </a:solidFill>
+                <a:latin typeface="Courier New" pitchFamily="34" charset="0"/>
+                <a:ea typeface="Courier New" pitchFamily="34" charset="-122"/>
+                <a:cs typeface="Courier New" pitchFamily="34" charset="-120"/>
+              </a:rPr>
+              <a:t>ProductDetailPageProps</a:t>
+            </a:r>
+            <a:r>
+              <a:rPr lang="en-US" sz="900" dirty="0">
+                <a:solidFill>
+                  <a:srgbClr val="F1F5F9"/>
+                </a:solidFill>
+                <a:latin typeface="Courier New" pitchFamily="34" charset="0"/>
+                <a:ea typeface="Courier New" pitchFamily="34" charset="-122"/>
+                <a:cs typeface="Courier New" pitchFamily="34" charset="-120"/>
+              </a:rPr>
+              <a:t> = {</a:t>
+            </a:r>
+          </a:p>
+          <a:p>
+            <a:r>
+              <a:rPr lang="en-US" sz="900" dirty="0">
+                <a:solidFill>
+                  <a:srgbClr val="F1F5F9"/>
+                </a:solidFill>
+                <a:latin typeface="Courier New" pitchFamily="34" charset="0"/>
+                <a:ea typeface="Courier New" pitchFamily="34" charset="-122"/>
+                <a:cs typeface="Courier New" pitchFamily="34" charset="-120"/>
+              </a:rPr>
+              <a:t>  params: Promise&lt;{</a:t>
+            </a:r>
+          </a:p>
+          <a:p>
+            <a:r>
+              <a:rPr lang="en-US" sz="900" dirty="0">
+                <a:solidFill>
+                  <a:srgbClr val="F1F5F9"/>
+                </a:solidFill>
+                <a:latin typeface="Courier New" pitchFamily="34" charset="0"/>
+                <a:ea typeface="Courier New" pitchFamily="34" charset="-122"/>
+                <a:cs typeface="Courier New" pitchFamily="34" charset="-120"/>
+              </a:rPr>
+              <a:t>    id: string;</a:t>
+            </a:r>
+          </a:p>
+          <a:p>
+            <a:r>
+              <a:rPr lang="en-US" sz="900" dirty="0">
+                <a:solidFill>
+                  <a:srgbClr val="F1F5F9"/>
+                </a:solidFill>
+                <a:latin typeface="Courier New" pitchFamily="34" charset="0"/>
+                <a:ea typeface="Courier New" pitchFamily="34" charset="-122"/>
+                <a:cs typeface="Courier New" pitchFamily="34" charset="-120"/>
+              </a:rPr>
+              <a:t>  }&gt;;</a:t>
+            </a:r>
+          </a:p>
+          <a:p>
+            <a:r>
+              <a:rPr lang="en-US" sz="900" dirty="0">
+                <a:solidFill>
+                  <a:srgbClr val="F1F5F9"/>
+                </a:solidFill>
+                <a:latin typeface="Courier New" pitchFamily="34" charset="0"/>
+                <a:ea typeface="Courier New" pitchFamily="34" charset="-122"/>
+                <a:cs typeface="Courier New" pitchFamily="34" charset="-120"/>
+              </a:rPr>
+              <a:t>};</a:t>
+            </a:r>
+          </a:p>
+          <a:p>
+            <a:endParaRPr lang="en-US" sz="900" dirty="0">
               <a:solidFill>
                 <a:srgbClr val="F1F5F9"/>
               </a:solidFill>
@@ -10382,71 +10773,159 @@
           </a:p>
           <a:p>
             <a:r>
-              <a:rPr lang="en-US" sz="800" dirty="0">
-                <a:solidFill>
-                  <a:srgbClr val="F1F5F9"/>
-                </a:solidFill>
-                <a:latin typeface="Courier New" pitchFamily="34" charset="0"/>
-                <a:ea typeface="Courier New" pitchFamily="34" charset="-122"/>
-                <a:cs typeface="Courier New" pitchFamily="34" charset="-120"/>
-              </a:rPr>
-              <a:t>type Props = {</a:t>
-            </a:r>
-          </a:p>
-          <a:p>
-            <a:r>
-              <a:rPr lang="en-US" sz="800" dirty="0">
-                <a:solidFill>
-                  <a:srgbClr val="F1F5F9"/>
-                </a:solidFill>
-                <a:latin typeface="Courier New" pitchFamily="34" charset="0"/>
-                <a:ea typeface="Courier New" pitchFamily="34" charset="-122"/>
-                <a:cs typeface="Courier New" pitchFamily="34" charset="-120"/>
-              </a:rPr>
-              <a:t>  params: Promise&lt;{</a:t>
-            </a:r>
-          </a:p>
-          <a:p>
-            <a:r>
-              <a:rPr lang="en-US" sz="800" dirty="0">
-                <a:solidFill>
-                  <a:srgbClr val="F1F5F9"/>
-                </a:solidFill>
-                <a:latin typeface="Courier New" pitchFamily="34" charset="0"/>
-                <a:ea typeface="Courier New" pitchFamily="34" charset="-122"/>
-                <a:cs typeface="Courier New" pitchFamily="34" charset="-120"/>
-              </a:rPr>
-              <a:t>    id: string;</a:t>
-            </a:r>
-          </a:p>
-          <a:p>
-            <a:r>
-              <a:rPr lang="en-US" sz="800" dirty="0">
-                <a:solidFill>
-                  <a:srgbClr val="F1F5F9"/>
-                </a:solidFill>
-                <a:latin typeface="Courier New" pitchFamily="34" charset="0"/>
-                <a:ea typeface="Courier New" pitchFamily="34" charset="-122"/>
-                <a:cs typeface="Courier New" pitchFamily="34" charset="-120"/>
-              </a:rPr>
-              <a:t>  }&gt;;</a:t>
-            </a:r>
-          </a:p>
-          <a:p>
-            <a:r>
-              <a:rPr lang="en-US" sz="800" dirty="0">
-                <a:solidFill>
-                  <a:srgbClr val="F1F5F9"/>
-                </a:solidFill>
-                <a:latin typeface="Courier New" pitchFamily="34" charset="0"/>
-                <a:ea typeface="Courier New" pitchFamily="34" charset="-122"/>
-                <a:cs typeface="Courier New" pitchFamily="34" charset="-120"/>
-              </a:rPr>
-              <a:t>};</a:t>
-            </a:r>
-          </a:p>
-          <a:p>
-            <a:endParaRPr lang="en-US" sz="800" dirty="0">
+              <a:rPr lang="en-US" sz="900" dirty="0">
+                <a:solidFill>
+                  <a:srgbClr val="F1F5F9"/>
+                </a:solidFill>
+                <a:latin typeface="Courier New" pitchFamily="34" charset="0"/>
+                <a:ea typeface="Courier New" pitchFamily="34" charset="-122"/>
+                <a:cs typeface="Courier New" pitchFamily="34" charset="-120"/>
+              </a:rPr>
+              <a:t>export default async function </a:t>
+            </a:r>
+            <a:r>
+              <a:rPr lang="en-US" sz="900" dirty="0" err="1">
+                <a:solidFill>
+                  <a:srgbClr val="F1F5F9"/>
+                </a:solidFill>
+                <a:latin typeface="Courier New" pitchFamily="34" charset="0"/>
+                <a:ea typeface="Courier New" pitchFamily="34" charset="-122"/>
+                <a:cs typeface="Courier New" pitchFamily="34" charset="-120"/>
+              </a:rPr>
+              <a:t>ProductDetailPage</a:t>
+            </a:r>
+            <a:r>
+              <a:rPr lang="en-US" sz="900" dirty="0">
+                <a:solidFill>
+                  <a:srgbClr val="F1F5F9"/>
+                </a:solidFill>
+                <a:latin typeface="Courier New" pitchFamily="34" charset="0"/>
+                <a:ea typeface="Courier New" pitchFamily="34" charset="-122"/>
+                <a:cs typeface="Courier New" pitchFamily="34" charset="-120"/>
+              </a:rPr>
+              <a:t>({</a:t>
+            </a:r>
+          </a:p>
+          <a:p>
+            <a:r>
+              <a:rPr lang="en-US" sz="900" dirty="0">
+                <a:solidFill>
+                  <a:srgbClr val="F1F5F9"/>
+                </a:solidFill>
+                <a:latin typeface="Courier New" pitchFamily="34" charset="0"/>
+                <a:ea typeface="Courier New" pitchFamily="34" charset="-122"/>
+                <a:cs typeface="Courier New" pitchFamily="34" charset="-120"/>
+              </a:rPr>
+              <a:t>  params,</a:t>
+            </a:r>
+          </a:p>
+          <a:p>
+            <a:r>
+              <a:rPr lang="en-US" sz="900" dirty="0">
+                <a:solidFill>
+                  <a:srgbClr val="F1F5F9"/>
+                </a:solidFill>
+                <a:latin typeface="Courier New" pitchFamily="34" charset="0"/>
+                <a:ea typeface="Courier New" pitchFamily="34" charset="-122"/>
+                <a:cs typeface="Courier New" pitchFamily="34" charset="-120"/>
+              </a:rPr>
+              <a:t>}: </a:t>
+            </a:r>
+            <a:r>
+              <a:rPr lang="en-US" sz="900" dirty="0" err="1">
+                <a:solidFill>
+                  <a:srgbClr val="F1F5F9"/>
+                </a:solidFill>
+                <a:latin typeface="Courier New" pitchFamily="34" charset="0"/>
+                <a:ea typeface="Courier New" pitchFamily="34" charset="-122"/>
+                <a:cs typeface="Courier New" pitchFamily="34" charset="-120"/>
+              </a:rPr>
+              <a:t>ProductDetailPageProps</a:t>
+            </a:r>
+            <a:r>
+              <a:rPr lang="en-US" sz="900" dirty="0">
+                <a:solidFill>
+                  <a:srgbClr val="F1F5F9"/>
+                </a:solidFill>
+                <a:latin typeface="Courier New" pitchFamily="34" charset="0"/>
+                <a:ea typeface="Courier New" pitchFamily="34" charset="-122"/>
+                <a:cs typeface="Courier New" pitchFamily="34" charset="-120"/>
+              </a:rPr>
+              <a:t>) {</a:t>
+            </a:r>
+          </a:p>
+          <a:p>
+            <a:r>
+              <a:rPr lang="en-US" sz="900" dirty="0">
+                <a:solidFill>
+                  <a:srgbClr val="F1F5F9"/>
+                </a:solidFill>
+                <a:latin typeface="Courier New" pitchFamily="34" charset="0"/>
+                <a:ea typeface="Courier New" pitchFamily="34" charset="-122"/>
+                <a:cs typeface="Courier New" pitchFamily="34" charset="-120"/>
+              </a:rPr>
+              <a:t>  const { id } = await params;</a:t>
+            </a:r>
+          </a:p>
+          <a:p>
+            <a:r>
+              <a:rPr lang="en-US" sz="900" dirty="0">
+                <a:solidFill>
+                  <a:srgbClr val="F1F5F9"/>
+                </a:solidFill>
+                <a:latin typeface="Courier New" pitchFamily="34" charset="0"/>
+                <a:ea typeface="Courier New" pitchFamily="34" charset="-122"/>
+                <a:cs typeface="Courier New" pitchFamily="34" charset="-120"/>
+              </a:rPr>
+              <a:t>  const product = </a:t>
+            </a:r>
+            <a:r>
+              <a:rPr lang="en-US" sz="900" dirty="0" err="1">
+                <a:solidFill>
+                  <a:srgbClr val="F1F5F9"/>
+                </a:solidFill>
+                <a:latin typeface="Courier New" pitchFamily="34" charset="0"/>
+                <a:ea typeface="Courier New" pitchFamily="34" charset="-122"/>
+                <a:cs typeface="Courier New" pitchFamily="34" charset="-120"/>
+              </a:rPr>
+              <a:t>products.find</a:t>
+            </a:r>
+            <a:r>
+              <a:rPr lang="en-US" sz="900" dirty="0">
+                <a:solidFill>
+                  <a:srgbClr val="F1F5F9"/>
+                </a:solidFill>
+                <a:latin typeface="Courier New" pitchFamily="34" charset="0"/>
+                <a:ea typeface="Courier New" pitchFamily="34" charset="-122"/>
+                <a:cs typeface="Courier New" pitchFamily="34" charset="-120"/>
+              </a:rPr>
+              <a:t>((item) =&gt; </a:t>
+            </a:r>
+            <a:r>
+              <a:rPr lang="en-US" sz="900" dirty="0" err="1">
+                <a:solidFill>
+                  <a:srgbClr val="F1F5F9"/>
+                </a:solidFill>
+                <a:latin typeface="Courier New" pitchFamily="34" charset="0"/>
+                <a:ea typeface="Courier New" pitchFamily="34" charset="-122"/>
+                <a:cs typeface="Courier New" pitchFamily="34" charset="-120"/>
+              </a:rPr>
+              <a:t>item.id</a:t>
+            </a:r>
+            <a:r>
+              <a:rPr lang="en-US" sz="900" dirty="0">
+                <a:solidFill>
+                  <a:srgbClr val="F1F5F9"/>
+                </a:solidFill>
+                <a:latin typeface="Courier New" pitchFamily="34" charset="0"/>
+                <a:ea typeface="Courier New" pitchFamily="34" charset="-122"/>
+                <a:cs typeface="Courier New" pitchFamily="34" charset="-120"/>
+              </a:rPr>
+              <a:t> === id);</a:t>
+            </a:r>
+          </a:p>
+          <a:p>
+            <a:endParaRPr lang="en-US" sz="900" dirty="0">
               <a:solidFill>
                 <a:srgbClr val="F1F5F9"/>
               </a:solidFill>
@@ -10457,181 +10936,198 @@
           </a:p>
           <a:p>
             <a:r>
-              <a:rPr lang="en-US" sz="800" dirty="0">
-                <a:solidFill>
-                  <a:srgbClr val="F1F5F9"/>
-                </a:solidFill>
-                <a:latin typeface="Courier New" pitchFamily="34" charset="0"/>
-                <a:ea typeface="Courier New" pitchFamily="34" charset="-122"/>
-                <a:cs typeface="Courier New" pitchFamily="34" charset="-120"/>
-              </a:rPr>
-              <a:t>export default async function </a:t>
-            </a:r>
-            <a:r>
-              <a:rPr lang="en-US" sz="800" dirty="0" err="1">
-                <a:solidFill>
-                  <a:srgbClr val="F1F5F9"/>
-                </a:solidFill>
-                <a:latin typeface="Courier New" pitchFamily="34" charset="0"/>
-                <a:ea typeface="Courier New" pitchFamily="34" charset="-122"/>
-                <a:cs typeface="Courier New" pitchFamily="34" charset="-120"/>
-              </a:rPr>
-              <a:t>ProductDetailPage</a:t>
-            </a:r>
-            <a:r>
-              <a:rPr lang="en-US" sz="800" dirty="0">
-                <a:solidFill>
-                  <a:srgbClr val="F1F5F9"/>
-                </a:solidFill>
-                <a:latin typeface="Courier New" pitchFamily="34" charset="0"/>
-                <a:ea typeface="Courier New" pitchFamily="34" charset="-122"/>
-                <a:cs typeface="Courier New" pitchFamily="34" charset="-120"/>
-              </a:rPr>
-              <a:t>({ params }: Props) {</a:t>
-            </a:r>
-          </a:p>
-          <a:p>
-            <a:r>
-              <a:rPr lang="en-US" sz="800" dirty="0">
-                <a:solidFill>
-                  <a:srgbClr val="F1F5F9"/>
-                </a:solidFill>
-                <a:latin typeface="Courier New" pitchFamily="34" charset="0"/>
-                <a:ea typeface="Courier New" pitchFamily="34" charset="-122"/>
-                <a:cs typeface="Courier New" pitchFamily="34" charset="-120"/>
-              </a:rPr>
-              <a:t>  const { id } = await params;</a:t>
-            </a:r>
-          </a:p>
-          <a:p>
-            <a:r>
-              <a:rPr lang="en-US" sz="800" dirty="0">
-                <a:solidFill>
-                  <a:srgbClr val="F1F5F9"/>
-                </a:solidFill>
-                <a:latin typeface="Courier New" pitchFamily="34" charset="0"/>
-                <a:ea typeface="Courier New" pitchFamily="34" charset="-122"/>
-                <a:cs typeface="Courier New" pitchFamily="34" charset="-120"/>
-              </a:rPr>
-              <a:t>  //  ↑ URL</a:t>
-            </a:r>
-            <a:r>
-              <a:rPr lang="ja-JP" altLang="en-US" sz="800">
-                <a:solidFill>
-                  <a:srgbClr val="F1F5F9"/>
-                </a:solidFill>
-                <a:latin typeface="Courier New" pitchFamily="34" charset="0"/>
-                <a:ea typeface="Courier New" pitchFamily="34" charset="-122"/>
-                <a:cs typeface="Courier New" pitchFamily="34" charset="-120"/>
-              </a:rPr>
-              <a:t>の </a:t>
-            </a:r>
-            <a:r>
-              <a:rPr lang="en-US" altLang="ja-JP" sz="800" dirty="0">
-                <a:solidFill>
-                  <a:srgbClr val="F1F5F9"/>
-                </a:solidFill>
-                <a:latin typeface="Courier New" pitchFamily="34" charset="0"/>
-                <a:ea typeface="Courier New" pitchFamily="34" charset="-122"/>
-                <a:cs typeface="Courier New" pitchFamily="34" charset="-120"/>
-              </a:rPr>
-              <a:t>[</a:t>
-            </a:r>
-            <a:r>
-              <a:rPr lang="en-US" sz="800" dirty="0">
-                <a:solidFill>
-                  <a:srgbClr val="F1F5F9"/>
-                </a:solidFill>
-                <a:latin typeface="Courier New" pitchFamily="34" charset="0"/>
-                <a:ea typeface="Courier New" pitchFamily="34" charset="-122"/>
-                <a:cs typeface="Courier New" pitchFamily="34" charset="-120"/>
-              </a:rPr>
-              <a:t>id] </a:t>
-            </a:r>
-            <a:r>
-              <a:rPr lang="ja-JP" altLang="en-US" sz="800">
-                <a:solidFill>
-                  <a:srgbClr val="F1F5F9"/>
-                </a:solidFill>
-                <a:latin typeface="Courier New" pitchFamily="34" charset="0"/>
-                <a:ea typeface="Courier New" pitchFamily="34" charset="-122"/>
-                <a:cs typeface="Courier New" pitchFamily="34" charset="-120"/>
-              </a:rPr>
-              <a:t>に入った値を取り出す</a:t>
-            </a:r>
-          </a:p>
-          <a:p>
-            <a:r>
-              <a:rPr lang="ja-JP" altLang="en-US" sz="800">
-                <a:solidFill>
-                  <a:srgbClr val="F1F5F9"/>
-                </a:solidFill>
-                <a:latin typeface="Courier New" pitchFamily="34" charset="0"/>
-                <a:ea typeface="Courier New" pitchFamily="34" charset="-122"/>
-                <a:cs typeface="Courier New" pitchFamily="34" charset="-120"/>
-              </a:rPr>
-              <a:t>  </a:t>
-            </a:r>
-            <a:r>
-              <a:rPr lang="en-US" altLang="ja-JP" sz="800" dirty="0">
-                <a:solidFill>
-                  <a:srgbClr val="F1F5F9"/>
-                </a:solidFill>
-                <a:latin typeface="Courier New" pitchFamily="34" charset="0"/>
-                <a:ea typeface="Courier New" pitchFamily="34" charset="-122"/>
-                <a:cs typeface="Courier New" pitchFamily="34" charset="-120"/>
-              </a:rPr>
-              <a:t>//    </a:t>
-            </a:r>
-            <a:r>
-              <a:rPr lang="ja-JP" altLang="en-US" sz="800">
-                <a:solidFill>
-                  <a:srgbClr val="F1F5F9"/>
-                </a:solidFill>
-                <a:latin typeface="Courier New" pitchFamily="34" charset="0"/>
-                <a:ea typeface="Courier New" pitchFamily="34" charset="-122"/>
-                <a:cs typeface="Courier New" pitchFamily="34" charset="-120"/>
-              </a:rPr>
-              <a:t>例</a:t>
-            </a:r>
-            <a:r>
-              <a:rPr lang="en-US" altLang="ja-JP" sz="800" dirty="0">
-                <a:solidFill>
-                  <a:srgbClr val="F1F5F9"/>
-                </a:solidFill>
-                <a:latin typeface="Courier New" pitchFamily="34" charset="0"/>
-                <a:ea typeface="Courier New" pitchFamily="34" charset="-122"/>
-                <a:cs typeface="Courier New" pitchFamily="34" charset="-120"/>
-              </a:rPr>
-              <a:t>: /</a:t>
-            </a:r>
-            <a:r>
-              <a:rPr lang="en-US" sz="800" dirty="0">
-                <a:solidFill>
-                  <a:srgbClr val="F1F5F9"/>
-                </a:solidFill>
-                <a:latin typeface="Courier New" pitchFamily="34" charset="0"/>
-                <a:ea typeface="Courier New" pitchFamily="34" charset="-122"/>
-                <a:cs typeface="Courier New" pitchFamily="34" charset="-120"/>
-              </a:rPr>
-              <a:t>products/gadget-speaker</a:t>
-            </a:r>
-          </a:p>
-          <a:p>
-            <a:r>
-              <a:rPr lang="en-US" sz="800" dirty="0">
-                <a:solidFill>
-                  <a:srgbClr val="F1F5F9"/>
-                </a:solidFill>
-                <a:latin typeface="Courier New" pitchFamily="34" charset="0"/>
-                <a:ea typeface="Courier New" pitchFamily="34" charset="-122"/>
-                <a:cs typeface="Courier New" pitchFamily="34" charset="-120"/>
-              </a:rPr>
-              <a:t>  //        → id = "gadget-speaker"</a:t>
-            </a:r>
-          </a:p>
-          <a:p>
-            <a:endParaRPr lang="en-US" sz="800" dirty="0">
+              <a:rPr lang="en-US" sz="900" dirty="0">
+                <a:solidFill>
+                  <a:srgbClr val="F1F5F9"/>
+                </a:solidFill>
+                <a:latin typeface="Courier New" pitchFamily="34" charset="0"/>
+                <a:ea typeface="Courier New" pitchFamily="34" charset="-122"/>
+                <a:cs typeface="Courier New" pitchFamily="34" charset="-120"/>
+              </a:rPr>
+              <a:t>  if (!product) {</a:t>
+            </a:r>
+          </a:p>
+          <a:p>
+            <a:r>
+              <a:rPr lang="en-US" sz="900" dirty="0">
+                <a:solidFill>
+                  <a:srgbClr val="F1F5F9"/>
+                </a:solidFill>
+                <a:latin typeface="Courier New" pitchFamily="34" charset="0"/>
+                <a:ea typeface="Courier New" pitchFamily="34" charset="-122"/>
+                <a:cs typeface="Courier New" pitchFamily="34" charset="-120"/>
+              </a:rPr>
+              <a:t>    return (</a:t>
+            </a:r>
+          </a:p>
+          <a:p>
+            <a:r>
+              <a:rPr lang="en-US" sz="900" dirty="0">
+                <a:solidFill>
+                  <a:srgbClr val="F1F5F9"/>
+                </a:solidFill>
+                <a:latin typeface="Courier New" pitchFamily="34" charset="0"/>
+                <a:ea typeface="Courier New" pitchFamily="34" charset="-122"/>
+                <a:cs typeface="Courier New" pitchFamily="34" charset="-120"/>
+              </a:rPr>
+              <a:t>      &lt;main&gt;</a:t>
+            </a:r>
+          </a:p>
+          <a:p>
+            <a:r>
+              <a:rPr lang="en-US" sz="900" dirty="0">
+                <a:solidFill>
+                  <a:srgbClr val="F1F5F9"/>
+                </a:solidFill>
+                <a:latin typeface="Courier New" pitchFamily="34" charset="0"/>
+                <a:ea typeface="Courier New" pitchFamily="34" charset="-122"/>
+                <a:cs typeface="Courier New" pitchFamily="34" charset="-120"/>
+              </a:rPr>
+              <a:t>        &lt;h1&gt;</a:t>
+            </a:r>
+            <a:r>
+              <a:rPr lang="ja-JP" altLang="en-US" sz="900">
+                <a:solidFill>
+                  <a:srgbClr val="F1F5F9"/>
+                </a:solidFill>
+                <a:latin typeface="Courier New" pitchFamily="34" charset="0"/>
+                <a:ea typeface="Courier New" pitchFamily="34" charset="-122"/>
+                <a:cs typeface="Courier New" pitchFamily="34" charset="-120"/>
+              </a:rPr>
+              <a:t>商品が見つかりませんでした</a:t>
+            </a:r>
+            <a:r>
+              <a:rPr lang="en-US" altLang="ja-JP" sz="900" dirty="0">
+                <a:solidFill>
+                  <a:srgbClr val="F1F5F9"/>
+                </a:solidFill>
+                <a:latin typeface="Courier New" pitchFamily="34" charset="0"/>
+                <a:ea typeface="Courier New" pitchFamily="34" charset="-122"/>
+                <a:cs typeface="Courier New" pitchFamily="34" charset="-120"/>
+              </a:rPr>
+              <a:t>&lt;/</a:t>
+            </a:r>
+            <a:r>
+              <a:rPr lang="en-US" sz="900" dirty="0">
+                <a:solidFill>
+                  <a:srgbClr val="F1F5F9"/>
+                </a:solidFill>
+                <a:latin typeface="Courier New" pitchFamily="34" charset="0"/>
+                <a:ea typeface="Courier New" pitchFamily="34" charset="-122"/>
+                <a:cs typeface="Courier New" pitchFamily="34" charset="-120"/>
+              </a:rPr>
+              <a:t>h1&gt;</a:t>
+            </a:r>
+          </a:p>
+          <a:p>
+            <a:r>
+              <a:rPr lang="en-US" sz="900" dirty="0">
+                <a:solidFill>
+                  <a:srgbClr val="F1F5F9"/>
+                </a:solidFill>
+                <a:latin typeface="Courier New" pitchFamily="34" charset="0"/>
+                <a:ea typeface="Courier New" pitchFamily="34" charset="-122"/>
+                <a:cs typeface="Courier New" pitchFamily="34" charset="-120"/>
+              </a:rPr>
+              <a:t>        &lt;Link </a:t>
+            </a:r>
+            <a:r>
+              <a:rPr lang="en-US" sz="900" dirty="0" err="1">
+                <a:solidFill>
+                  <a:srgbClr val="F1F5F9"/>
+                </a:solidFill>
+                <a:latin typeface="Courier New" pitchFamily="34" charset="0"/>
+                <a:ea typeface="Courier New" pitchFamily="34" charset="-122"/>
+                <a:cs typeface="Courier New" pitchFamily="34" charset="-120"/>
+              </a:rPr>
+              <a:t>href</a:t>
+            </a:r>
+            <a:r>
+              <a:rPr lang="en-US" sz="900" dirty="0">
+                <a:solidFill>
+                  <a:srgbClr val="F1F5F9"/>
+                </a:solidFill>
+                <a:latin typeface="Courier New" pitchFamily="34" charset="0"/>
+                <a:ea typeface="Courier New" pitchFamily="34" charset="-122"/>
+                <a:cs typeface="Courier New" pitchFamily="34" charset="-120"/>
+              </a:rPr>
+              <a:t>="/"&gt;</a:t>
+            </a:r>
+            <a:r>
+              <a:rPr lang="ja-JP" altLang="en-US" sz="900">
+                <a:solidFill>
+                  <a:srgbClr val="F1F5F9"/>
+                </a:solidFill>
+                <a:latin typeface="Courier New" pitchFamily="34" charset="0"/>
+                <a:ea typeface="Courier New" pitchFamily="34" charset="-122"/>
+                <a:cs typeface="Courier New" pitchFamily="34" charset="-120"/>
+              </a:rPr>
+              <a:t>商品一覧に戻る</a:t>
+            </a:r>
+            <a:r>
+              <a:rPr lang="en-US" altLang="ja-JP" sz="900" dirty="0">
+                <a:solidFill>
+                  <a:srgbClr val="F1F5F9"/>
+                </a:solidFill>
+                <a:latin typeface="Courier New" pitchFamily="34" charset="0"/>
+                <a:ea typeface="Courier New" pitchFamily="34" charset="-122"/>
+                <a:cs typeface="Courier New" pitchFamily="34" charset="-120"/>
+              </a:rPr>
+              <a:t>&lt;/</a:t>
+            </a:r>
+            <a:r>
+              <a:rPr lang="en-US" sz="900" dirty="0">
+                <a:solidFill>
+                  <a:srgbClr val="F1F5F9"/>
+                </a:solidFill>
+                <a:latin typeface="Courier New" pitchFamily="34" charset="0"/>
+                <a:ea typeface="Courier New" pitchFamily="34" charset="-122"/>
+                <a:cs typeface="Courier New" pitchFamily="34" charset="-120"/>
+              </a:rPr>
+              <a:t>Link&gt;</a:t>
+            </a:r>
+          </a:p>
+          <a:p>
+            <a:r>
+              <a:rPr lang="en-US" sz="900" dirty="0">
+                <a:solidFill>
+                  <a:srgbClr val="F1F5F9"/>
+                </a:solidFill>
+                <a:latin typeface="Courier New" pitchFamily="34" charset="0"/>
+                <a:ea typeface="Courier New" pitchFamily="34" charset="-122"/>
+                <a:cs typeface="Courier New" pitchFamily="34" charset="-120"/>
+              </a:rPr>
+              <a:t>      &lt;/main&gt;</a:t>
+            </a:r>
+          </a:p>
+          <a:p>
+            <a:r>
+              <a:rPr lang="en-US" sz="900" dirty="0">
+                <a:solidFill>
+                  <a:srgbClr val="F1F5F9"/>
+                </a:solidFill>
+                <a:latin typeface="Courier New" pitchFamily="34" charset="0"/>
+                <a:ea typeface="Courier New" pitchFamily="34" charset="-122"/>
+                <a:cs typeface="Courier New" pitchFamily="34" charset="-120"/>
+              </a:rPr>
+              <a:t>    );</a:t>
+            </a:r>
+          </a:p>
+          <a:p>
+            <a:r>
+              <a:rPr lang="en-US" sz="900" dirty="0">
+                <a:solidFill>
+                  <a:srgbClr val="F1F5F9"/>
+                </a:solidFill>
+                <a:latin typeface="Courier New" pitchFamily="34" charset="0"/>
+                <a:ea typeface="Courier New" pitchFamily="34" charset="-122"/>
+                <a:cs typeface="Courier New" pitchFamily="34" charset="-120"/>
+              </a:rPr>
+              <a:t>  }</a:t>
+            </a:r>
+          </a:p>
+          <a:p>
+            <a:endParaRPr lang="en-US" sz="900" dirty="0">
               <a:solidFill>
                 <a:srgbClr val="F1F5F9"/>
               </a:solidFill>
@@ -10642,318 +11138,20 @@
           </a:p>
           <a:p>
             <a:r>
-              <a:rPr lang="en-US" sz="800" dirty="0">
-                <a:solidFill>
-                  <a:srgbClr val="F1F5F9"/>
-                </a:solidFill>
-                <a:latin typeface="Courier New" pitchFamily="34" charset="0"/>
-                <a:ea typeface="Courier New" pitchFamily="34" charset="-122"/>
-                <a:cs typeface="Courier New" pitchFamily="34" charset="-120"/>
-              </a:rPr>
-              <a:t>  const product = </a:t>
-            </a:r>
-            <a:r>
-              <a:rPr lang="en-US" sz="800" dirty="0" err="1">
-                <a:solidFill>
-                  <a:srgbClr val="F1F5F9"/>
-                </a:solidFill>
-                <a:latin typeface="Courier New" pitchFamily="34" charset="0"/>
-                <a:ea typeface="Courier New" pitchFamily="34" charset="-122"/>
-                <a:cs typeface="Courier New" pitchFamily="34" charset="-120"/>
-              </a:rPr>
-              <a:t>products.find</a:t>
-            </a:r>
-            <a:r>
-              <a:rPr lang="en-US" sz="800" dirty="0">
-                <a:solidFill>
-                  <a:srgbClr val="F1F5F9"/>
-                </a:solidFill>
-                <a:latin typeface="Courier New" pitchFamily="34" charset="0"/>
-                <a:ea typeface="Courier New" pitchFamily="34" charset="-122"/>
-                <a:cs typeface="Courier New" pitchFamily="34" charset="-120"/>
-              </a:rPr>
-              <a:t>((product) =&gt; </a:t>
-            </a:r>
-            <a:r>
-              <a:rPr lang="en-US" sz="800" dirty="0" err="1">
-                <a:solidFill>
-                  <a:srgbClr val="F1F5F9"/>
-                </a:solidFill>
-                <a:latin typeface="Courier New" pitchFamily="34" charset="0"/>
-                <a:ea typeface="Courier New" pitchFamily="34" charset="-122"/>
-                <a:cs typeface="Courier New" pitchFamily="34" charset="-120"/>
-              </a:rPr>
-              <a:t>product.id</a:t>
-            </a:r>
-            <a:r>
-              <a:rPr lang="en-US" sz="800" dirty="0">
-                <a:solidFill>
-                  <a:srgbClr val="F1F5F9"/>
-                </a:solidFill>
-                <a:latin typeface="Courier New" pitchFamily="34" charset="0"/>
-                <a:ea typeface="Courier New" pitchFamily="34" charset="-122"/>
-                <a:cs typeface="Courier New" pitchFamily="34" charset="-120"/>
-              </a:rPr>
-              <a:t> === id);</a:t>
-            </a:r>
-          </a:p>
-          <a:p>
-            <a:r>
-              <a:rPr lang="en-US" sz="800" dirty="0">
-                <a:solidFill>
-                  <a:srgbClr val="F1F5F9"/>
-                </a:solidFill>
-                <a:latin typeface="Courier New" pitchFamily="34" charset="0"/>
-                <a:ea typeface="Courier New" pitchFamily="34" charset="-122"/>
-                <a:cs typeface="Courier New" pitchFamily="34" charset="-120"/>
-              </a:rPr>
-              <a:t>  //  ↑ </a:t>
-            </a:r>
-            <a:r>
-              <a:rPr lang="ja-JP" altLang="en-US" sz="800">
-                <a:solidFill>
-                  <a:srgbClr val="F1F5F9"/>
-                </a:solidFill>
-                <a:latin typeface="Courier New" pitchFamily="34" charset="0"/>
-                <a:ea typeface="Courier New" pitchFamily="34" charset="-122"/>
-                <a:cs typeface="Courier New" pitchFamily="34" charset="-120"/>
-              </a:rPr>
-              <a:t>商品データの中から、</a:t>
-            </a:r>
-          </a:p>
-          <a:p>
-            <a:r>
-              <a:rPr lang="ja-JP" altLang="en-US" sz="800">
-                <a:solidFill>
-                  <a:srgbClr val="F1F5F9"/>
-                </a:solidFill>
-                <a:latin typeface="Courier New" pitchFamily="34" charset="0"/>
-                <a:ea typeface="Courier New" pitchFamily="34" charset="-122"/>
-                <a:cs typeface="Courier New" pitchFamily="34" charset="-120"/>
-              </a:rPr>
-              <a:t>  </a:t>
-            </a:r>
-            <a:r>
-              <a:rPr lang="en-US" altLang="ja-JP" sz="800" dirty="0">
-                <a:solidFill>
-                  <a:srgbClr val="F1F5F9"/>
-                </a:solidFill>
-                <a:latin typeface="Courier New" pitchFamily="34" charset="0"/>
-                <a:ea typeface="Courier New" pitchFamily="34" charset="-122"/>
-                <a:cs typeface="Courier New" pitchFamily="34" charset="-120"/>
-              </a:rPr>
-              <a:t>//    </a:t>
-            </a:r>
-            <a:r>
-              <a:rPr lang="en-US" sz="800" dirty="0">
-                <a:solidFill>
-                  <a:srgbClr val="F1F5F9"/>
-                </a:solidFill>
-                <a:latin typeface="Courier New" pitchFamily="34" charset="0"/>
-                <a:ea typeface="Courier New" pitchFamily="34" charset="-122"/>
-                <a:cs typeface="Courier New" pitchFamily="34" charset="-120"/>
-              </a:rPr>
-              <a:t>URL</a:t>
-            </a:r>
-            <a:r>
-              <a:rPr lang="ja-JP" altLang="en-US" sz="800">
-                <a:solidFill>
-                  <a:srgbClr val="F1F5F9"/>
-                </a:solidFill>
-                <a:latin typeface="Courier New" pitchFamily="34" charset="0"/>
-                <a:ea typeface="Courier New" pitchFamily="34" charset="-122"/>
-                <a:cs typeface="Courier New" pitchFamily="34" charset="-120"/>
-              </a:rPr>
-              <a:t>の</a:t>
-            </a:r>
-            <a:r>
-              <a:rPr lang="en-US" sz="800" dirty="0">
-                <a:solidFill>
-                  <a:srgbClr val="F1F5F9"/>
-                </a:solidFill>
-                <a:latin typeface="Courier New" pitchFamily="34" charset="0"/>
-                <a:ea typeface="Courier New" pitchFamily="34" charset="-122"/>
-                <a:cs typeface="Courier New" pitchFamily="34" charset="-120"/>
-              </a:rPr>
-              <a:t>id</a:t>
-            </a:r>
-            <a:r>
-              <a:rPr lang="ja-JP" altLang="en-US" sz="800">
-                <a:solidFill>
-                  <a:srgbClr val="F1F5F9"/>
-                </a:solidFill>
-                <a:latin typeface="Courier New" pitchFamily="34" charset="0"/>
-                <a:ea typeface="Courier New" pitchFamily="34" charset="-122"/>
-                <a:cs typeface="Courier New" pitchFamily="34" charset="-120"/>
-              </a:rPr>
-              <a:t>と一致する商品を探す</a:t>
-            </a:r>
-          </a:p>
-          <a:p>
-            <a:endParaRPr lang="ja-JP" altLang="en-US" sz="800">
-              <a:solidFill>
-                <a:srgbClr val="F1F5F9"/>
-              </a:solidFill>
-              <a:latin typeface="Courier New" pitchFamily="34" charset="0"/>
-              <a:ea typeface="Courier New" pitchFamily="34" charset="-122"/>
-              <a:cs typeface="Courier New" pitchFamily="34" charset="-120"/>
-            </a:endParaRPr>
-          </a:p>
-          <a:p>
-            <a:r>
-              <a:rPr lang="ja-JP" altLang="en-US" sz="800">
-                <a:solidFill>
-                  <a:srgbClr val="F1F5F9"/>
-                </a:solidFill>
-                <a:latin typeface="Courier New" pitchFamily="34" charset="0"/>
-                <a:ea typeface="Courier New" pitchFamily="34" charset="-122"/>
-                <a:cs typeface="Courier New" pitchFamily="34" charset="-120"/>
-              </a:rPr>
-              <a:t>  </a:t>
-            </a:r>
-            <a:r>
-              <a:rPr lang="en-US" sz="800" dirty="0">
-                <a:solidFill>
-                  <a:srgbClr val="F1F5F9"/>
-                </a:solidFill>
-                <a:latin typeface="Courier New" pitchFamily="34" charset="0"/>
-                <a:ea typeface="Courier New" pitchFamily="34" charset="-122"/>
-                <a:cs typeface="Courier New" pitchFamily="34" charset="-120"/>
-              </a:rPr>
-              <a:t>if (!product) {</a:t>
-            </a:r>
-          </a:p>
-          <a:p>
-            <a:r>
-              <a:rPr lang="en-US" sz="800" dirty="0">
-                <a:solidFill>
-                  <a:srgbClr val="F1F5F9"/>
-                </a:solidFill>
-                <a:latin typeface="Courier New" pitchFamily="34" charset="0"/>
-                <a:ea typeface="Courier New" pitchFamily="34" charset="-122"/>
-                <a:cs typeface="Courier New" pitchFamily="34" charset="-120"/>
-              </a:rPr>
-              <a:t>    </a:t>
-            </a:r>
-            <a:r>
-              <a:rPr lang="en-US" sz="800" dirty="0" err="1">
-                <a:solidFill>
-                  <a:srgbClr val="F1F5F9"/>
-                </a:solidFill>
-                <a:latin typeface="Courier New" pitchFamily="34" charset="0"/>
-                <a:ea typeface="Courier New" pitchFamily="34" charset="-122"/>
-                <a:cs typeface="Courier New" pitchFamily="34" charset="-120"/>
-              </a:rPr>
-              <a:t>notFound</a:t>
-            </a:r>
-            <a:r>
-              <a:rPr lang="en-US" sz="800" dirty="0">
-                <a:solidFill>
-                  <a:srgbClr val="F1F5F9"/>
-                </a:solidFill>
-                <a:latin typeface="Courier New" pitchFamily="34" charset="0"/>
-                <a:ea typeface="Courier New" pitchFamily="34" charset="-122"/>
-                <a:cs typeface="Courier New" pitchFamily="34" charset="-120"/>
-              </a:rPr>
-              <a:t>();</a:t>
-            </a:r>
-          </a:p>
-          <a:p>
-            <a:r>
-              <a:rPr lang="en-US" sz="800" dirty="0">
-                <a:solidFill>
-                  <a:srgbClr val="F1F5F9"/>
-                </a:solidFill>
-                <a:latin typeface="Courier New" pitchFamily="34" charset="0"/>
-                <a:ea typeface="Courier New" pitchFamily="34" charset="-122"/>
-                <a:cs typeface="Courier New" pitchFamily="34" charset="-120"/>
-              </a:rPr>
-              <a:t>  }</a:t>
-            </a:r>
-          </a:p>
-          <a:p>
-            <a:r>
-              <a:rPr lang="en-US" sz="800" dirty="0">
-                <a:solidFill>
-                  <a:srgbClr val="F1F5F9"/>
-                </a:solidFill>
-                <a:latin typeface="Courier New" pitchFamily="34" charset="0"/>
-                <a:ea typeface="Courier New" pitchFamily="34" charset="-122"/>
-                <a:cs typeface="Courier New" pitchFamily="34" charset="-120"/>
-              </a:rPr>
-              <a:t>  //  ↑ </a:t>
-            </a:r>
-            <a:r>
-              <a:rPr lang="ja-JP" altLang="en-US" sz="800">
-                <a:solidFill>
-                  <a:srgbClr val="F1F5F9"/>
-                </a:solidFill>
-                <a:latin typeface="Courier New" pitchFamily="34" charset="0"/>
-                <a:ea typeface="Courier New" pitchFamily="34" charset="-122"/>
-                <a:cs typeface="Courier New" pitchFamily="34" charset="-120"/>
-              </a:rPr>
-              <a:t>商品が見つからなかったら</a:t>
-            </a:r>
-            <a:r>
-              <a:rPr lang="en-US" altLang="ja-JP" sz="800" dirty="0">
-                <a:solidFill>
-                  <a:srgbClr val="F1F5F9"/>
-                </a:solidFill>
-                <a:latin typeface="Courier New" pitchFamily="34" charset="0"/>
-                <a:ea typeface="Courier New" pitchFamily="34" charset="-122"/>
-                <a:cs typeface="Courier New" pitchFamily="34" charset="-120"/>
-              </a:rPr>
-              <a:t>404</a:t>
-            </a:r>
-            <a:r>
-              <a:rPr lang="ja-JP" altLang="en-US" sz="800">
-                <a:solidFill>
-                  <a:srgbClr val="F1F5F9"/>
-                </a:solidFill>
-                <a:latin typeface="Courier New" pitchFamily="34" charset="0"/>
-                <a:ea typeface="Courier New" pitchFamily="34" charset="-122"/>
-                <a:cs typeface="Courier New" pitchFamily="34" charset="-120"/>
-              </a:rPr>
-              <a:t>ページを表示</a:t>
-            </a:r>
-          </a:p>
-          <a:p>
-            <a:endParaRPr lang="ja-JP" altLang="en-US" sz="800">
-              <a:solidFill>
-                <a:srgbClr val="F1F5F9"/>
-              </a:solidFill>
-              <a:latin typeface="Courier New" pitchFamily="34" charset="0"/>
-              <a:ea typeface="Courier New" pitchFamily="34" charset="-122"/>
-              <a:cs typeface="Courier New" pitchFamily="34" charset="-120"/>
-            </a:endParaRPr>
-          </a:p>
-          <a:p>
-            <a:r>
-              <a:rPr lang="ja-JP" altLang="en-US" sz="800">
-                <a:solidFill>
-                  <a:srgbClr val="F1F5F9"/>
-                </a:solidFill>
-                <a:latin typeface="Courier New" pitchFamily="34" charset="0"/>
-                <a:ea typeface="Courier New" pitchFamily="34" charset="-122"/>
-                <a:cs typeface="Courier New" pitchFamily="34" charset="-120"/>
-              </a:rPr>
-              <a:t>  </a:t>
-            </a:r>
-            <a:r>
-              <a:rPr lang="en-US" sz="800" dirty="0">
-                <a:solidFill>
-                  <a:srgbClr val="F1F5F9"/>
-                </a:solidFill>
-                <a:latin typeface="Courier New" pitchFamily="34" charset="0"/>
-                <a:ea typeface="Courier New" pitchFamily="34" charset="-122"/>
-                <a:cs typeface="Courier New" pitchFamily="34" charset="-120"/>
-              </a:rPr>
-              <a:t>return (</a:t>
-            </a:r>
-          </a:p>
-          <a:p>
-            <a:r>
-              <a:rPr lang="en-US" sz="800" dirty="0">
+              <a:rPr lang="en-US" sz="900" dirty="0">
+                <a:solidFill>
+                  <a:srgbClr val="F1F5F9"/>
+                </a:solidFill>
+                <a:latin typeface="Courier New" pitchFamily="34" charset="0"/>
+                <a:ea typeface="Courier New" pitchFamily="34" charset="-122"/>
+                <a:cs typeface="Courier New" pitchFamily="34" charset="-120"/>
+              </a:rPr>
+              <a:t>  return (</a:t>
+            </a:r>
+          </a:p>
+          <a:p>
+            <a:r>
+              <a:rPr lang="en-US" sz="900" dirty="0">
                 <a:solidFill>
                   <a:srgbClr val="F1F5F9"/>
                 </a:solidFill>
@@ -10966,7 +11164,7 @@
           </a:p>
           <a:p>
             <a:r>
-              <a:rPr lang="en-US" sz="800" dirty="0">
+              <a:rPr lang="en-US" sz="900" dirty="0">
                 <a:solidFill>
                   <a:srgbClr val="F1F5F9"/>
                 </a:solidFill>
@@ -10977,7 +11175,7 @@
               <a:t>      &lt;h1&gt;{</a:t>
             </a:r>
             <a:r>
-              <a:rPr lang="en-US" sz="800" dirty="0" err="1">
+              <a:rPr lang="en-US" sz="900" dirty="0" err="1">
                 <a:solidFill>
                   <a:srgbClr val="F1F5F9"/>
                 </a:solidFill>
@@ -10988,7 +11186,7 @@
               <a:t>product.name</a:t>
             </a:r>
             <a:r>
-              <a:rPr lang="en-US" sz="800" dirty="0">
+              <a:rPr lang="en-US" sz="900" dirty="0">
                 <a:solidFill>
                   <a:srgbClr val="F1F5F9"/>
                 </a:solidFill>
@@ -11001,143 +11199,7 @@
           </a:p>
           <a:p>
             <a:r>
-              <a:rPr lang="en-US" sz="800" dirty="0">
-                <a:solidFill>
-                  <a:srgbClr val="F1F5F9"/>
-                </a:solidFill>
-                <a:latin typeface="Courier New" pitchFamily="34" charset="0"/>
-                <a:ea typeface="Courier New" pitchFamily="34" charset="-122"/>
-                <a:cs typeface="Courier New" pitchFamily="34" charset="-120"/>
-              </a:rPr>
-              <a:t>      &lt;</a:t>
-            </a:r>
-            <a:r>
-              <a:rPr lang="en-US" sz="800" dirty="0" err="1">
-                <a:solidFill>
-                  <a:srgbClr val="F1F5F9"/>
-                </a:solidFill>
-                <a:latin typeface="Courier New" pitchFamily="34" charset="0"/>
-                <a:ea typeface="Courier New" pitchFamily="34" charset="-122"/>
-                <a:cs typeface="Courier New" pitchFamily="34" charset="-120"/>
-              </a:rPr>
-              <a:t>img</a:t>
-            </a:r>
-            <a:r>
-              <a:rPr lang="en-US" sz="800" dirty="0">
-                <a:solidFill>
-                  <a:srgbClr val="F1F5F9"/>
-                </a:solidFill>
-                <a:latin typeface="Courier New" pitchFamily="34" charset="0"/>
-                <a:ea typeface="Courier New" pitchFamily="34" charset="-122"/>
-                <a:cs typeface="Courier New" pitchFamily="34" charset="-120"/>
-              </a:rPr>
-              <a:t> </a:t>
-            </a:r>
-            <a:r>
-              <a:rPr lang="en-US" sz="800" dirty="0" err="1">
-                <a:solidFill>
-                  <a:srgbClr val="F1F5F9"/>
-                </a:solidFill>
-                <a:latin typeface="Courier New" pitchFamily="34" charset="0"/>
-                <a:ea typeface="Courier New" pitchFamily="34" charset="-122"/>
-                <a:cs typeface="Courier New" pitchFamily="34" charset="-120"/>
-              </a:rPr>
-              <a:t>src</a:t>
-            </a:r>
-            <a:r>
-              <a:rPr lang="en-US" sz="800" dirty="0">
-                <a:solidFill>
-                  <a:srgbClr val="F1F5F9"/>
-                </a:solidFill>
-                <a:latin typeface="Courier New" pitchFamily="34" charset="0"/>
-                <a:ea typeface="Courier New" pitchFamily="34" charset="-122"/>
-                <a:cs typeface="Courier New" pitchFamily="34" charset="-120"/>
-              </a:rPr>
-              <a:t>={</a:t>
-            </a:r>
-            <a:r>
-              <a:rPr lang="en-US" sz="800" dirty="0" err="1">
-                <a:solidFill>
-                  <a:srgbClr val="F1F5F9"/>
-                </a:solidFill>
-                <a:latin typeface="Courier New" pitchFamily="34" charset="0"/>
-                <a:ea typeface="Courier New" pitchFamily="34" charset="-122"/>
-                <a:cs typeface="Courier New" pitchFamily="34" charset="-120"/>
-              </a:rPr>
-              <a:t>product.imageUrl</a:t>
-            </a:r>
-            <a:r>
-              <a:rPr lang="en-US" sz="800" dirty="0">
-                <a:solidFill>
-                  <a:srgbClr val="F1F5F9"/>
-                </a:solidFill>
-                <a:latin typeface="Courier New" pitchFamily="34" charset="0"/>
-                <a:ea typeface="Courier New" pitchFamily="34" charset="-122"/>
-                <a:cs typeface="Courier New" pitchFamily="34" charset="-120"/>
-              </a:rPr>
-              <a:t>} alt={</a:t>
-            </a:r>
-            <a:r>
-              <a:rPr lang="en-US" sz="800" dirty="0" err="1">
-                <a:solidFill>
-                  <a:srgbClr val="F1F5F9"/>
-                </a:solidFill>
-                <a:latin typeface="Courier New" pitchFamily="34" charset="0"/>
-                <a:ea typeface="Courier New" pitchFamily="34" charset="-122"/>
-                <a:cs typeface="Courier New" pitchFamily="34" charset="-120"/>
-              </a:rPr>
-              <a:t>product.name</a:t>
-            </a:r>
-            <a:r>
-              <a:rPr lang="en-US" sz="800" dirty="0">
-                <a:solidFill>
-                  <a:srgbClr val="F1F5F9"/>
-                </a:solidFill>
-                <a:latin typeface="Courier New" pitchFamily="34" charset="0"/>
-                <a:ea typeface="Courier New" pitchFamily="34" charset="-122"/>
-                <a:cs typeface="Courier New" pitchFamily="34" charset="-120"/>
-              </a:rPr>
-              <a:t>} /&gt;</a:t>
-            </a:r>
-          </a:p>
-          <a:p>
-            <a:r>
-              <a:rPr lang="en-US" sz="800" dirty="0">
-                <a:solidFill>
-                  <a:srgbClr val="F1F5F9"/>
-                </a:solidFill>
-                <a:latin typeface="Courier New" pitchFamily="34" charset="0"/>
-                <a:ea typeface="Courier New" pitchFamily="34" charset="-122"/>
-                <a:cs typeface="Courier New" pitchFamily="34" charset="-120"/>
-              </a:rPr>
-              <a:t>      &lt;p&gt;¥{</a:t>
-            </a:r>
-            <a:r>
-              <a:rPr lang="en-US" sz="800" dirty="0" err="1">
-                <a:solidFill>
-                  <a:srgbClr val="F1F5F9"/>
-                </a:solidFill>
-                <a:latin typeface="Courier New" pitchFamily="34" charset="0"/>
-                <a:ea typeface="Courier New" pitchFamily="34" charset="-122"/>
-                <a:cs typeface="Courier New" pitchFamily="34" charset="-120"/>
-              </a:rPr>
-              <a:t>product.price.toLocaleString</a:t>
-            </a:r>
-            <a:r>
-              <a:rPr lang="en-US" sz="800" dirty="0">
-                <a:solidFill>
-                  <a:srgbClr val="F1F5F9"/>
-                </a:solidFill>
-                <a:latin typeface="Courier New" pitchFamily="34" charset="0"/>
-                <a:ea typeface="Courier New" pitchFamily="34" charset="-122"/>
-                <a:cs typeface="Courier New" pitchFamily="34" charset="-120"/>
-              </a:rPr>
-              <a:t>()}&lt;/p&gt;</a:t>
-            </a:r>
-          </a:p>
-          <a:p>
-            <a:r>
-              <a:rPr lang="en-US" sz="800" dirty="0">
+              <a:rPr lang="en-US" sz="900" dirty="0">
                 <a:solidFill>
                   <a:srgbClr val="F1F5F9"/>
                 </a:solidFill>
@@ -11148,31 +11210,53 @@
               <a:t>      &lt;p&gt;{</a:t>
             </a:r>
             <a:r>
-              <a:rPr lang="en-US" sz="800" dirty="0" err="1">
-                <a:solidFill>
-                  <a:srgbClr val="F1F5F9"/>
-                </a:solidFill>
-                <a:latin typeface="Courier New" pitchFamily="34" charset="0"/>
-                <a:ea typeface="Courier New" pitchFamily="34" charset="-122"/>
-                <a:cs typeface="Courier New" pitchFamily="34" charset="-120"/>
-              </a:rPr>
-              <a:t>product.category</a:t>
-            </a:r>
-            <a:r>
-              <a:rPr lang="en-US" sz="800" dirty="0">
-                <a:solidFill>
-                  <a:srgbClr val="F1F5F9"/>
-                </a:solidFill>
-                <a:latin typeface="Courier New" pitchFamily="34" charset="0"/>
-                <a:ea typeface="Courier New" pitchFamily="34" charset="-122"/>
-                <a:cs typeface="Courier New" pitchFamily="34" charset="-120"/>
-              </a:rPr>
-              <a:t>}&lt;/p&gt;</a:t>
-            </a:r>
-          </a:p>
-          <a:p>
-            <a:r>
-              <a:rPr lang="en-US" sz="800" dirty="0">
+              <a:rPr lang="en-US" sz="900" dirty="0" err="1">
+                <a:solidFill>
+                  <a:srgbClr val="F1F5F9"/>
+                </a:solidFill>
+                <a:latin typeface="Courier New" pitchFamily="34" charset="0"/>
+                <a:ea typeface="Courier New" pitchFamily="34" charset="-122"/>
+                <a:cs typeface="Courier New" pitchFamily="34" charset="-120"/>
+              </a:rPr>
+              <a:t>formatPrice</a:t>
+            </a:r>
+            <a:r>
+              <a:rPr lang="en-US" sz="900" dirty="0">
+                <a:solidFill>
+                  <a:srgbClr val="F1F5F9"/>
+                </a:solidFill>
+                <a:latin typeface="Courier New" pitchFamily="34" charset="0"/>
+                <a:ea typeface="Courier New" pitchFamily="34" charset="-122"/>
+                <a:cs typeface="Courier New" pitchFamily="34" charset="-120"/>
+              </a:rPr>
+              <a:t>(</a:t>
+            </a:r>
+            <a:r>
+              <a:rPr lang="en-US" sz="900" dirty="0" err="1">
+                <a:solidFill>
+                  <a:srgbClr val="F1F5F9"/>
+                </a:solidFill>
+                <a:latin typeface="Courier New" pitchFamily="34" charset="0"/>
+                <a:ea typeface="Courier New" pitchFamily="34" charset="-122"/>
+                <a:cs typeface="Courier New" pitchFamily="34" charset="-120"/>
+              </a:rPr>
+              <a:t>product.price</a:t>
+            </a:r>
+            <a:r>
+              <a:rPr lang="en-US" sz="900" dirty="0">
+                <a:solidFill>
+                  <a:srgbClr val="F1F5F9"/>
+                </a:solidFill>
+                <a:latin typeface="Courier New" pitchFamily="34" charset="0"/>
+                <a:ea typeface="Courier New" pitchFamily="34" charset="-122"/>
+                <a:cs typeface="Courier New" pitchFamily="34" charset="-120"/>
+              </a:rPr>
+              <a:t>)}&lt;/p&gt;</a:t>
+            </a:r>
+          </a:p>
+          <a:p>
+            <a:r>
+              <a:rPr lang="en-US" sz="900" dirty="0">
                 <a:solidFill>
                   <a:srgbClr val="F1F5F9"/>
                 </a:solidFill>
@@ -11185,7 +11269,7 @@
           </a:p>
           <a:p>
             <a:r>
-              <a:rPr lang="en-US" sz="800" dirty="0">
+              <a:rPr lang="en-US" sz="900" dirty="0">
                 <a:solidFill>
                   <a:srgbClr val="F1F5F9"/>
                 </a:solidFill>
@@ -11198,7 +11282,7 @@
           </a:p>
           <a:p>
             <a:r>
-              <a:rPr lang="en-US" sz="800" dirty="0">
+              <a:rPr lang="en-US" sz="900" dirty="0">
                 <a:solidFill>
                   <a:srgbClr val="F1F5F9"/>
                 </a:solidFill>
@@ -11208,7 +11292,7 @@
               </a:rPr>
               <a:t>}</a:t>
             </a:r>
-            <a:endParaRPr lang="en-US" sz="800" dirty="0"/>
+            <a:endParaRPr lang="en-US" sz="900" dirty="0"/>
           </a:p>
         </p:txBody>
       </p:sp>
@@ -11585,7 +11669,7 @@
                   <a:srgbClr val="0D4F4A"/>
                 </a:solidFill>
               </a:rPr>
-              <a:t>Phase 1 〜 8 を順番に進めよう</a:t>
+              <a:t>Phase 1 〜 6 を順番に進めよう</a:t>
             </a:r>
             <a:endParaRPr lang="en-US" sz="2600" dirty="0"/>
           </a:p>
@@ -11723,16 +11807,13 @@
           <a:bodyPr wrap="square" lIns="0" tIns="0" rIns="0" bIns="0" rtlCol="0" anchor="ctr"/>
           <a:lstStyle/>
           <a:p>
-            <a:pPr marL="0" indent="0">
-              <a:buNone/>
-            </a:pPr>
-            <a:r>
-              <a:rPr lang="en-US" sz="1200" b="1" dirty="0">
+            <a:r>
+              <a:rPr lang="ja-JP" altLang="en-US" sz="1200" b="1">
                 <a:solidFill>
                   <a:srgbClr val="0D4F4A"/>
                 </a:solidFill>
               </a:rPr>
-              <a:t>型とデータを育てる</a:t>
+              <a:t>型とデータを読む・追加する</a:t>
             </a:r>
             <a:endParaRPr lang="en-US" sz="1200" dirty="0"/>
           </a:p>
@@ -11759,9 +11840,17 @@
           <a:bodyPr wrap="square" lIns="0" tIns="0" rIns="0" bIns="0" rtlCol="0" anchor="ctr"/>
           <a:lstStyle/>
           <a:p>
-            <a:pPr marL="0" indent="0">
-              <a:buNone/>
-            </a:pPr>
+            <a:r>
+              <a:rPr lang="en-US" sz="1000" dirty="0" err="1">
+                <a:solidFill>
+                  <a:srgbClr val="6B7280"/>
+                </a:solidFill>
+                <a:latin typeface="Courier New" pitchFamily="34" charset="0"/>
+                <a:ea typeface="Courier New" pitchFamily="34" charset="-122"/>
+                <a:cs typeface="Courier New" pitchFamily="34" charset="-120"/>
+              </a:rPr>
+              <a:t>product.ts</a:t>
+            </a:r>
             <a:r>
               <a:rPr lang="en-US" sz="1000" dirty="0">
                 <a:solidFill>
@@ -11771,7 +11860,18 @@
                 <a:ea typeface="Courier New" pitchFamily="34" charset="-122"/>
                 <a:cs typeface="Courier New" pitchFamily="34" charset="-120"/>
               </a:rPr>
-              <a:t>product.ts, products.ts</a:t>
+              <a:t>, </a:t>
+            </a:r>
+            <a:r>
+              <a:rPr lang="en-US" sz="1000" dirty="0" err="1">
+                <a:solidFill>
+                  <a:srgbClr val="6B7280"/>
+                </a:solidFill>
+                <a:latin typeface="Courier New" pitchFamily="34" charset="0"/>
+                <a:ea typeface="Courier New" pitchFamily="34" charset="-122"/>
+                <a:cs typeface="Courier New" pitchFamily="34" charset="-120"/>
+              </a:rPr>
+              <a:t>products.ts</a:t>
             </a:r>
             <a:endParaRPr lang="en-US" sz="1000" dirty="0"/>
           </a:p>
@@ -11909,16 +12009,29 @@
           <a:bodyPr wrap="square" lIns="0" tIns="0" rIns="0" bIns="0" rtlCol="0" anchor="ctr"/>
           <a:lstStyle/>
           <a:p>
-            <a:pPr marL="0" indent="0">
-              <a:buNone/>
-            </a:pPr>
+            <a:r>
+              <a:rPr lang="en-US" sz="1200" b="1" dirty="0" err="1">
+                <a:solidFill>
+                  <a:srgbClr val="0D4F4A"/>
+                </a:solidFill>
+              </a:rPr>
+              <a:t>ProductCard</a:t>
+            </a:r>
             <a:r>
               <a:rPr lang="en-US" sz="1200" b="1" dirty="0">
                 <a:solidFill>
                   <a:srgbClr val="0D4F4A"/>
                 </a:solidFill>
               </a:rPr>
-              <a:t>ProductCard を完成</a:t>
+              <a:t> </a:t>
+            </a:r>
+            <a:r>
+              <a:rPr lang="ja-JP" altLang="en-US" sz="1200" b="1">
+                <a:solidFill>
+                  <a:srgbClr val="0D4F4A"/>
+                </a:solidFill>
+              </a:rPr>
+              <a:t>を完成させる</a:t>
             </a:r>
             <a:endParaRPr lang="en-US" sz="1200" dirty="0"/>
           </a:p>
@@ -11945,11 +12058,8 @@
           <a:bodyPr wrap="square" lIns="0" tIns="0" rIns="0" bIns="0" rtlCol="0" anchor="ctr"/>
           <a:lstStyle/>
           <a:p>
-            <a:pPr marL="0" indent="0">
-              <a:buNone/>
-            </a:pPr>
-            <a:r>
-              <a:rPr lang="en-US" sz="1000" dirty="0">
+            <a:r>
+              <a:rPr lang="ja-JP" altLang="en-US" sz="1000">
                 <a:solidFill>
                   <a:srgbClr val="6B7280"/>
                 </a:solidFill>
@@ -11957,7 +12067,7 @@
                 <a:ea typeface="Courier New" pitchFamily="34" charset="-122"/>
                 <a:cs typeface="Courier New" pitchFamily="34" charset="-120"/>
               </a:rPr>
-              <a:t>画像・カテゴリ・評価を表示</a:t>
+              <a:t>説明・価格・評価・在庫を表示</a:t>
             </a:r>
             <a:endParaRPr lang="en-US" sz="1000" dirty="0"/>
           </a:p>
@@ -12095,16 +12205,21 @@
           <a:bodyPr wrap="square" lIns="0" tIns="0" rIns="0" bIns="0" rtlCol="0" anchor="ctr"/>
           <a:lstStyle/>
           <a:p>
-            <a:pPr marL="0" indent="0">
-              <a:buNone/>
-            </a:pPr>
             <a:r>
               <a:rPr lang="en-US" sz="1200" b="1" dirty="0">
                 <a:solidFill>
                   <a:srgbClr val="0D4F4A"/>
                 </a:solidFill>
               </a:rPr>
-              <a:t>map で一覧表示確認</a:t>
+              <a:t>map </a:t>
+            </a:r>
+            <a:r>
+              <a:rPr lang="ja-JP" altLang="en-US" sz="1200" b="1">
+                <a:solidFill>
+                  <a:srgbClr val="0D4F4A"/>
+                </a:solidFill>
+              </a:rPr>
+              <a:t>で一覧表示する</a:t>
             </a:r>
             <a:endParaRPr lang="en-US" sz="1200" dirty="0"/>
           </a:p>
@@ -12131,11 +12246,8 @@
           <a:bodyPr wrap="square" lIns="0" tIns="0" rIns="0" bIns="0" rtlCol="0" anchor="ctr"/>
           <a:lstStyle/>
           <a:p>
-            <a:pPr marL="0" indent="0">
-              <a:buNone/>
-            </a:pPr>
-            <a:r>
-              <a:rPr lang="en-US" sz="1000" dirty="0">
+            <a:r>
+              <a:rPr lang="en-US" sz="1000" dirty="0" err="1">
                 <a:solidFill>
                   <a:srgbClr val="6B7280"/>
                 </a:solidFill>
@@ -12143,7 +12255,7 @@
                 <a:ea typeface="Courier New" pitchFamily="34" charset="-122"/>
                 <a:cs typeface="Courier New" pitchFamily="34" charset="-120"/>
               </a:rPr>
-              <a:t>ProductList.tsx のmapを読む</a:t>
+              <a:t>ProductList.tsx</a:t>
             </a:r>
             <a:endParaRPr lang="en-US" sz="1000" dirty="0"/>
           </a:p>
@@ -12281,16 +12393,29 @@
           <a:bodyPr wrap="square" lIns="0" tIns="0" rIns="0" bIns="0" rtlCol="0" anchor="ctr"/>
           <a:lstStyle/>
           <a:p>
-            <a:pPr marL="0" indent="0">
-              <a:buNone/>
-            </a:pPr>
+            <a:r>
+              <a:rPr lang="en-US" sz="1200" b="1" dirty="0" err="1">
+                <a:solidFill>
+                  <a:srgbClr val="0D4F4A"/>
+                </a:solidFill>
+              </a:rPr>
+              <a:t>useState</a:t>
+            </a:r>
             <a:r>
               <a:rPr lang="en-US" sz="1200" b="1" dirty="0">
                 <a:solidFill>
                   <a:srgbClr val="0D4F4A"/>
                 </a:solidFill>
               </a:rPr>
-              <a:t>useState を理解する</a:t>
+              <a:t> </a:t>
+            </a:r>
+            <a:r>
+              <a:rPr lang="ja-JP" altLang="en-US" sz="1200" b="1">
+                <a:solidFill>
+                  <a:srgbClr val="0D4F4A"/>
+                </a:solidFill>
+              </a:rPr>
+              <a:t>を確認する</a:t>
             </a:r>
             <a:endParaRPr lang="en-US" sz="1200" dirty="0"/>
           </a:p>
@@ -12304,8 +12429,8 @@
         </p:nvSpPr>
         <p:spPr>
           <a:xfrm>
-            <a:off x="5413248" y="2651760"/>
-            <a:ext cx="3474720" cy="256032"/>
+            <a:off x="5346746" y="2660904"/>
+            <a:ext cx="3797254" cy="256032"/>
           </a:xfrm>
           <a:prstGeom prst="rect">
             <a:avLst/>
@@ -12317,9 +12442,17 @@
           <a:bodyPr wrap="square" lIns="0" tIns="0" rIns="0" bIns="0" rtlCol="0" anchor="ctr"/>
           <a:lstStyle/>
           <a:p>
-            <a:pPr marL="0" indent="0">
-              <a:buNone/>
-            </a:pPr>
+            <a:r>
+              <a:rPr lang="en-US" sz="1000" dirty="0" err="1">
+                <a:solidFill>
+                  <a:srgbClr val="6B7280"/>
+                </a:solidFill>
+                <a:latin typeface="Courier New" pitchFamily="34" charset="0"/>
+                <a:ea typeface="Courier New" pitchFamily="34" charset="-122"/>
+                <a:cs typeface="Courier New" pitchFamily="34" charset="-120"/>
+              </a:rPr>
+              <a:t>searchTerm</a:t>
+            </a:r>
             <a:r>
               <a:rPr lang="en-US" sz="1000" dirty="0">
                 <a:solidFill>
@@ -12329,7 +12462,40 @@
                 <a:ea typeface="Courier New" pitchFamily="34" charset="-122"/>
                 <a:cs typeface="Courier New" pitchFamily="34" charset="-120"/>
               </a:rPr>
-              <a:t>page.tsx の searchTerm</a:t>
+              <a:t> / </a:t>
+            </a:r>
+            <a:r>
+              <a:rPr lang="en-US" sz="1000" dirty="0" err="1">
+                <a:solidFill>
+                  <a:srgbClr val="6B7280"/>
+                </a:solidFill>
+                <a:latin typeface="Courier New" pitchFamily="34" charset="0"/>
+                <a:ea typeface="Courier New" pitchFamily="34" charset="-122"/>
+                <a:cs typeface="Courier New" pitchFamily="34" charset="-120"/>
+              </a:rPr>
+              <a:t>selectedCategory</a:t>
+            </a:r>
+            <a:r>
+              <a:rPr lang="en-US" sz="1000" dirty="0">
+                <a:solidFill>
+                  <a:srgbClr val="6B7280"/>
+                </a:solidFill>
+                <a:latin typeface="Courier New" pitchFamily="34" charset="0"/>
+                <a:ea typeface="Courier New" pitchFamily="34" charset="-122"/>
+                <a:cs typeface="Courier New" pitchFamily="34" charset="-120"/>
+              </a:rPr>
+              <a:t> / </a:t>
+            </a:r>
+            <a:r>
+              <a:rPr lang="en-US" sz="1000" dirty="0" err="1">
+                <a:solidFill>
+                  <a:srgbClr val="6B7280"/>
+                </a:solidFill>
+                <a:latin typeface="Courier New" pitchFamily="34" charset="0"/>
+                <a:ea typeface="Courier New" pitchFamily="34" charset="-122"/>
+                <a:cs typeface="Courier New" pitchFamily="34" charset="-120"/>
+              </a:rPr>
+              <a:t>filteredProducts</a:t>
             </a:r>
             <a:endParaRPr lang="en-US" sz="1000" dirty="0"/>
           </a:p>
@@ -12467,16 +12633,29 @@
           <a:bodyPr wrap="square" lIns="0" tIns="0" rIns="0" bIns="0" rtlCol="0" anchor="ctr"/>
           <a:lstStyle/>
           <a:p>
-            <a:pPr marL="0" indent="0">
-              <a:buNone/>
-            </a:pPr>
+            <a:r>
+              <a:rPr lang="en-US" sz="1200" b="1" dirty="0" err="1">
+                <a:solidFill>
+                  <a:srgbClr val="0D4F4A"/>
+                </a:solidFill>
+              </a:rPr>
+              <a:t>useEffect</a:t>
+            </a:r>
             <a:r>
               <a:rPr lang="en-US" sz="1200" b="1" dirty="0">
                 <a:solidFill>
                   <a:srgbClr val="0D4F4A"/>
                 </a:solidFill>
               </a:rPr>
-              <a:t>絞り込み機能を作る</a:t>
+              <a:t> </a:t>
+            </a:r>
+            <a:r>
+              <a:rPr lang="ja-JP" altLang="en-US" sz="1200" b="1">
+                <a:solidFill>
+                  <a:srgbClr val="0D4F4A"/>
+                </a:solidFill>
+              </a:rPr>
+              <a:t>で絞り込みを動かす</a:t>
             </a:r>
             <a:endParaRPr lang="en-US" sz="1200" dirty="0"/>
           </a:p>
@@ -12503,9 +12682,17 @@
           <a:bodyPr wrap="square" lIns="0" tIns="0" rIns="0" bIns="0" rtlCol="0" anchor="ctr"/>
           <a:lstStyle/>
           <a:p>
-            <a:pPr marL="0" indent="0">
-              <a:buNone/>
-            </a:pPr>
+            <a:r>
+              <a:rPr lang="en-US" sz="1000" dirty="0" err="1">
+                <a:solidFill>
+                  <a:srgbClr val="6B7280"/>
+                </a:solidFill>
+                <a:latin typeface="Courier New" pitchFamily="34" charset="0"/>
+                <a:ea typeface="Courier New" pitchFamily="34" charset="-122"/>
+                <a:cs typeface="Courier New" pitchFamily="34" charset="-120"/>
+              </a:rPr>
+              <a:t>productFilters.ts</a:t>
+            </a:r>
             <a:r>
               <a:rPr lang="en-US" sz="1000" dirty="0">
                 <a:solidFill>
@@ -12515,7 +12702,18 @@
                 <a:ea typeface="Courier New" pitchFamily="34" charset="-122"/>
                 <a:cs typeface="Courier New" pitchFamily="34" charset="-120"/>
               </a:rPr>
-              <a:t>filterProducts を実装</a:t>
+              <a:t>, </a:t>
+            </a:r>
+            <a:r>
+              <a:rPr lang="en-US" sz="1000" dirty="0" err="1">
+                <a:solidFill>
+                  <a:srgbClr val="6B7280"/>
+                </a:solidFill>
+                <a:latin typeface="Courier New" pitchFamily="34" charset="0"/>
+                <a:ea typeface="Courier New" pitchFamily="34" charset="-122"/>
+                <a:cs typeface="Courier New" pitchFamily="34" charset="-120"/>
+              </a:rPr>
+              <a:t>page.tsx</a:t>
             </a:r>
             <a:endParaRPr lang="en-US" sz="1000" dirty="0"/>
           </a:p>
@@ -12653,16 +12851,13 @@
           <a:bodyPr wrap="square" lIns="0" tIns="0" rIns="0" bIns="0" rtlCol="0" anchor="ctr"/>
           <a:lstStyle/>
           <a:p>
-            <a:pPr marL="0" indent="0">
-              <a:buNone/>
-            </a:pPr>
-            <a:r>
-              <a:rPr lang="en-US" sz="1200" b="1" dirty="0">
+            <a:r>
+              <a:rPr lang="ja-JP" altLang="en-US" sz="1200" b="1">
                 <a:solidFill>
                   <a:srgbClr val="0D4F4A"/>
                 </a:solidFill>
               </a:rPr>
-              <a:t>詳細ページを完成</a:t>
+              <a:t>詳細ページを完成させる</a:t>
             </a:r>
             <a:endParaRPr lang="en-US" sz="1200" dirty="0"/>
           </a:p>
@@ -12689,9 +12884,6 @@
           <a:bodyPr wrap="square" lIns="0" tIns="0" rIns="0" bIns="0" rtlCol="0" anchor="ctr"/>
           <a:lstStyle/>
           <a:p>
-            <a:pPr marL="0" indent="0">
-              <a:buNone/>
-            </a:pPr>
             <a:r>
               <a:rPr lang="en-US" sz="1000" dirty="0">
                 <a:solidFill>
@@ -12701,7 +12893,18 @@
                 <a:ea typeface="Courier New" pitchFamily="34" charset="-122"/>
                 <a:cs typeface="Courier New" pitchFamily="34" charset="-120"/>
               </a:rPr>
-              <a:t>products/[id]/page.tsx</a:t>
+              <a:t>products/[id]/</a:t>
+            </a:r>
+            <a:r>
+              <a:rPr lang="en-US" sz="1000" dirty="0" err="1">
+                <a:solidFill>
+                  <a:srgbClr val="6B7280"/>
+                </a:solidFill>
+                <a:latin typeface="Courier New" pitchFamily="34" charset="0"/>
+                <a:ea typeface="Courier New" pitchFamily="34" charset="-122"/>
+                <a:cs typeface="Courier New" pitchFamily="34" charset="-120"/>
+              </a:rPr>
+              <a:t>page.tsx</a:t>
             </a:r>
             <a:endParaRPr lang="en-US" sz="1000" dirty="0"/>
           </a:p>
@@ -12709,13 +12912,91 @@
       </p:sp>
       <p:sp>
         <p:nvSpPr>
-          <p:cNvPr id="35" name="Shape 33"/>
-          <p:cNvSpPr/>
-          <p:nvPr/>
-        </p:nvSpPr>
-        <p:spPr>
-          <a:xfrm>
-            <a:off x="365760" y="3968496"/>
+          <p:cNvPr id="37" name="Text 35"/>
+          <p:cNvSpPr/>
+          <p:nvPr/>
+        </p:nvSpPr>
+        <p:spPr>
+          <a:xfrm>
+            <a:off x="457200" y="4078224"/>
+            <a:ext cx="384048" cy="502920"/>
+          </a:xfrm>
+          <a:prstGeom prst="rect">
+            <a:avLst/>
+          </a:prstGeom>
+          <a:noFill/>
+          <a:ln/>
+        </p:spPr>
+        <p:txBody>
+          <a:bodyPr wrap="square" lIns="0" tIns="0" rIns="0" bIns="0" rtlCol="0" anchor="ctr"/>
+          <a:lstStyle/>
+          <a:p>
+            <a:pPr marL="0" indent="0" algn="ctr">
+              <a:buNone/>
+            </a:pPr>
+            <a:r>
+              <a:rPr lang="en-US" sz="1400" b="1" dirty="0">
+                <a:solidFill>
+                  <a:srgbClr val="FFFFFF"/>
+                </a:solidFill>
+              </a:rPr>
+              <a:t>7</a:t>
+            </a:r>
+            <a:endParaRPr lang="en-US" sz="1400" dirty="0"/>
+          </a:p>
+        </p:txBody>
+      </p:sp>
+      <p:sp>
+        <p:nvSpPr>
+          <p:cNvPr id="45" name="Text 43"/>
+          <p:cNvSpPr/>
+          <p:nvPr/>
+        </p:nvSpPr>
+        <p:spPr>
+          <a:xfrm>
+            <a:off x="7772400" y="4754880"/>
+            <a:ext cx="1097280" cy="274320"/>
+          </a:xfrm>
+          <a:prstGeom prst="rect">
+            <a:avLst/>
+          </a:prstGeom>
+          <a:noFill/>
+          <a:ln/>
+        </p:spPr>
+        <p:txBody>
+          <a:bodyPr wrap="square" rtlCol="0" anchor="ctr"/>
+          <a:lstStyle/>
+          <a:p>
+            <a:pPr marL="0" indent="0" algn="r">
+              <a:buNone/>
+            </a:pPr>
+            <a:r>
+              <a:rPr lang="en-US" sz="1000" dirty="0">
+                <a:solidFill>
+                  <a:srgbClr val="6B7280"/>
+                </a:solidFill>
+              </a:rPr>
+              <a:t>18 / 18</a:t>
+            </a:r>
+            <a:endParaRPr lang="en-US" sz="1000" dirty="0"/>
+          </a:p>
+        </p:txBody>
+      </p:sp>
+      <p:sp>
+        <p:nvSpPr>
+          <p:cNvPr id="46" name="Shape 23">
+            <a:extLst>
+              <a:ext uri="{FF2B5EF4-FFF2-40B4-BE49-F238E27FC236}">
+                <a16:creationId xmlns:a16="http://schemas.microsoft.com/office/drawing/2014/main" id="{E5A56DD8-79C6-D069-BF45-44F1B79C3A56}"/>
+              </a:ext>
+            </a:extLst>
+          </p:cNvPr>
+          <p:cNvSpPr/>
+          <p:nvPr/>
+        </p:nvSpPr>
+        <p:spPr>
+          <a:xfrm>
+            <a:off x="2743200" y="4091940"/>
             <a:ext cx="4206240" cy="731520"/>
           </a:xfrm>
           <a:prstGeom prst="roundRect">
@@ -12750,13 +13031,19 @@
       </p:sp>
       <p:sp>
         <p:nvSpPr>
-          <p:cNvPr id="36" name="Shape 34"/>
-          <p:cNvSpPr/>
-          <p:nvPr/>
-        </p:nvSpPr>
-        <p:spPr>
-          <a:xfrm>
-            <a:off x="457200" y="4078224"/>
+          <p:cNvPr id="47" name="Shape 24">
+            <a:extLst>
+              <a:ext uri="{FF2B5EF4-FFF2-40B4-BE49-F238E27FC236}">
+                <a16:creationId xmlns:a16="http://schemas.microsoft.com/office/drawing/2014/main" id="{472FAA1A-7822-5C66-7179-1095619B2839}"/>
+              </a:ext>
+            </a:extLst>
+          </p:cNvPr>
+          <p:cNvSpPr/>
+          <p:nvPr/>
+        </p:nvSpPr>
+        <p:spPr>
+          <a:xfrm>
+            <a:off x="2834640" y="4201668"/>
             <a:ext cx="384048" cy="502920"/>
           </a:xfrm>
           <a:prstGeom prst="roundRect">
@@ -12778,20 +13065,33 @@
           <a:bodyPr/>
           <a:lstStyle/>
           <a:p>
-            <a:endParaRPr lang="ja-JP" altLang="en-US"/>
-          </a:p>
-        </p:txBody>
-      </p:sp>
-      <p:sp>
-        <p:nvSpPr>
-          <p:cNvPr id="37" name="Text 35"/>
-          <p:cNvSpPr/>
-          <p:nvPr/>
-        </p:nvSpPr>
-        <p:spPr>
-          <a:xfrm>
-            <a:off x="457200" y="4078224"/>
-            <a:ext cx="384048" cy="502920"/>
+            <a:r>
+              <a:rPr lang="ja-JP" altLang="en-US" sz="800">
+                <a:solidFill>
+                  <a:schemeClr val="bg1"/>
+                </a:solidFill>
+              </a:rPr>
+              <a:t>番外編</a:t>
+            </a:r>
+          </a:p>
+        </p:txBody>
+      </p:sp>
+      <p:sp>
+        <p:nvSpPr>
+          <p:cNvPr id="48" name="Text 26">
+            <a:extLst>
+              <a:ext uri="{FF2B5EF4-FFF2-40B4-BE49-F238E27FC236}">
+                <a16:creationId xmlns:a16="http://schemas.microsoft.com/office/drawing/2014/main" id="{884E4F94-9EC2-A30D-C0E0-63C63B1806FF}"/>
+              </a:ext>
+            </a:extLst>
+          </p:cNvPr>
+          <p:cNvSpPr/>
+          <p:nvPr/>
+        </p:nvSpPr>
+        <p:spPr>
+          <a:xfrm>
+            <a:off x="3310128" y="4183380"/>
+            <a:ext cx="3474720" cy="274320"/>
           </a:xfrm>
           <a:prstGeom prst="rect">
             <a:avLst/>
@@ -12803,31 +13103,34 @@
           <a:bodyPr wrap="square" lIns="0" tIns="0" rIns="0" bIns="0" rtlCol="0" anchor="ctr"/>
           <a:lstStyle/>
           <a:p>
-            <a:pPr marL="0" indent="0" algn="ctr">
-              <a:buNone/>
-            </a:pPr>
-            <a:r>
-              <a:rPr lang="en-US" sz="1400" b="1" dirty="0">
-                <a:solidFill>
-                  <a:srgbClr val="FFFFFF"/>
-                </a:solidFill>
-              </a:rPr>
-              <a:t>7</a:t>
-            </a:r>
-            <a:endParaRPr lang="en-US" sz="1400" dirty="0"/>
-          </a:p>
-        </p:txBody>
-      </p:sp>
-      <p:sp>
-        <p:nvSpPr>
-          <p:cNvPr id="38" name="Text 36"/>
-          <p:cNvSpPr/>
-          <p:nvPr/>
-        </p:nvSpPr>
-        <p:spPr>
-          <a:xfrm>
-            <a:off x="932688" y="4059936"/>
-            <a:ext cx="3474720" cy="274320"/>
+            <a:r>
+              <a:rPr lang="ja-JP" altLang="en-US" sz="1200" b="1">
+                <a:solidFill>
+                  <a:srgbClr val="0D4F4A"/>
+                </a:solidFill>
+              </a:rPr>
+              <a:t>カートとお気に入り</a:t>
+            </a:r>
+            <a:endParaRPr lang="en-US" sz="1200" dirty="0"/>
+          </a:p>
+        </p:txBody>
+      </p:sp>
+      <p:sp>
+        <p:nvSpPr>
+          <p:cNvPr id="49" name="Text 27">
+            <a:extLst>
+              <a:ext uri="{FF2B5EF4-FFF2-40B4-BE49-F238E27FC236}">
+                <a16:creationId xmlns:a16="http://schemas.microsoft.com/office/drawing/2014/main" id="{615D18BB-0634-F119-29E9-6CB19CB6D6D2}"/>
+              </a:ext>
+            </a:extLst>
+          </p:cNvPr>
+          <p:cNvSpPr/>
+          <p:nvPr/>
+        </p:nvSpPr>
+        <p:spPr>
+          <a:xfrm>
+            <a:off x="3310128" y="4475988"/>
+            <a:ext cx="3474720" cy="256032"/>
           </a:xfrm>
           <a:prstGeom prst="rect">
             <a:avLst/>
@@ -12839,45 +13142,17 @@
           <a:bodyPr wrap="square" lIns="0" tIns="0" rIns="0" bIns="0" rtlCol="0" anchor="ctr"/>
           <a:lstStyle/>
           <a:p>
-            <a:pPr marL="0" indent="0">
-              <a:buNone/>
-            </a:pPr>
-            <a:r>
-              <a:rPr lang="en-US" sz="1200" b="1" dirty="0">
-                <a:solidFill>
-                  <a:srgbClr val="0D4F4A"/>
-                </a:solidFill>
-              </a:rPr>
-              <a:t>カートとお気に入り</a:t>
-            </a:r>
-            <a:endParaRPr lang="en-US" sz="1200" dirty="0"/>
-          </a:p>
-        </p:txBody>
-      </p:sp>
-      <p:sp>
-        <p:nvSpPr>
-          <p:cNvPr id="39" name="Text 37"/>
-          <p:cNvSpPr/>
-          <p:nvPr/>
-        </p:nvSpPr>
-        <p:spPr>
-          <a:xfrm>
-            <a:off x="932688" y="4352544"/>
-            <a:ext cx="3474720" cy="256032"/>
-          </a:xfrm>
-          <a:prstGeom prst="rect">
-            <a:avLst/>
-          </a:prstGeom>
-          <a:noFill/>
-          <a:ln/>
-        </p:spPr>
-        <p:txBody>
-          <a:bodyPr wrap="square" lIns="0" tIns="0" rIns="0" bIns="0" rtlCol="0" anchor="ctr"/>
-          <a:lstStyle/>
-          <a:p>
-            <a:pPr marL="0" indent="0">
-              <a:buNone/>
-            </a:pPr>
+            <a:r>
+              <a:rPr lang="ja-JP" altLang="en-US" sz="1000">
+                <a:solidFill>
+                  <a:srgbClr val="6B7280"/>
+                </a:solidFill>
+                <a:latin typeface="Courier New" pitchFamily="34" charset="0"/>
+                <a:ea typeface="Courier New" pitchFamily="34" charset="-122"/>
+                <a:cs typeface="Courier New" pitchFamily="34" charset="-120"/>
+              </a:rPr>
+              <a:t>配列 </a:t>
+            </a:r>
             <a:r>
               <a:rPr lang="en-US" sz="1000" dirty="0">
                 <a:solidFill>
@@ -12887,183 +13162,30 @@
                 <a:ea typeface="Courier New" pitchFamily="34" charset="-122"/>
                 <a:cs typeface="Courier New" pitchFamily="34" charset="-120"/>
               </a:rPr>
-              <a:t>useState で追加・削除</a:t>
-            </a:r>
-            <a:endParaRPr lang="en-US" sz="1000" dirty="0"/>
-          </a:p>
-        </p:txBody>
-      </p:sp>
-      <p:sp>
-        <p:nvSpPr>
-          <p:cNvPr id="40" name="Shape 38"/>
-          <p:cNvSpPr/>
-          <p:nvPr/>
-        </p:nvSpPr>
-        <p:spPr>
-          <a:xfrm>
-            <a:off x="4846320" y="3968496"/>
-            <a:ext cx="4206240" cy="731520"/>
-          </a:xfrm>
-          <a:prstGeom prst="roundRect">
-            <a:avLst>
-              <a:gd name="adj" fmla="val 12500"/>
-            </a:avLst>
-          </a:prstGeom>
-          <a:solidFill>
-            <a:srgbClr val="FFFFFF"/>
-          </a:solidFill>
-          <a:ln w="12700">
-            <a:solidFill>
-              <a:srgbClr val="E5E7EB"/>
-            </a:solidFill>
-            <a:prstDash val="solid"/>
-          </a:ln>
-          <a:effectLst>
-            <a:outerShdw blurRad="101600" dist="38100" dir="2700000" algn="bl" rotWithShape="0">
-              <a:srgbClr val="000000">
-                <a:alpha val="10000"/>
-              </a:srgbClr>
-            </a:outerShdw>
-          </a:effectLst>
-        </p:spPr>
-        <p:txBody>
-          <a:bodyPr/>
-          <a:lstStyle/>
-          <a:p>
-            <a:endParaRPr lang="ja-JP" altLang="en-US"/>
-          </a:p>
-        </p:txBody>
-      </p:sp>
-      <p:sp>
-        <p:nvSpPr>
-          <p:cNvPr id="41" name="Shape 39"/>
-          <p:cNvSpPr/>
-          <p:nvPr/>
-        </p:nvSpPr>
-        <p:spPr>
-          <a:xfrm>
-            <a:off x="4937760" y="4078224"/>
-            <a:ext cx="384048" cy="502920"/>
-          </a:xfrm>
-          <a:prstGeom prst="roundRect">
-            <a:avLst>
-              <a:gd name="adj" fmla="val 16667"/>
-            </a:avLst>
-          </a:prstGeom>
-          <a:solidFill>
-            <a:srgbClr val="0F766E"/>
-          </a:solidFill>
-          <a:ln w="12700">
-            <a:solidFill>
-              <a:srgbClr val="0F766E"/>
-            </a:solidFill>
-            <a:prstDash val="solid"/>
-          </a:ln>
-        </p:spPr>
-        <p:txBody>
-          <a:bodyPr/>
-          <a:lstStyle/>
-          <a:p>
-            <a:endParaRPr lang="ja-JP" altLang="en-US"/>
-          </a:p>
-        </p:txBody>
-      </p:sp>
-      <p:sp>
-        <p:nvSpPr>
-          <p:cNvPr id="42" name="Text 40"/>
-          <p:cNvSpPr/>
-          <p:nvPr/>
-        </p:nvSpPr>
-        <p:spPr>
-          <a:xfrm>
-            <a:off x="4937760" y="4078224"/>
-            <a:ext cx="384048" cy="502920"/>
-          </a:xfrm>
-          <a:prstGeom prst="rect">
-            <a:avLst/>
-          </a:prstGeom>
-          <a:noFill/>
-          <a:ln/>
-        </p:spPr>
-        <p:txBody>
-          <a:bodyPr wrap="square" lIns="0" tIns="0" rIns="0" bIns="0" rtlCol="0" anchor="ctr"/>
-          <a:lstStyle/>
-          <a:p>
-            <a:pPr marL="0" indent="0" algn="ctr">
-              <a:buNone/>
-            </a:pPr>
-            <a:r>
-              <a:rPr lang="en-US" sz="1400" b="1" dirty="0">
-                <a:solidFill>
-                  <a:srgbClr val="FFFFFF"/>
-                </a:solidFill>
-              </a:rPr>
-              <a:t>8</a:t>
-            </a:r>
-            <a:endParaRPr lang="en-US" sz="1400" dirty="0"/>
-          </a:p>
-        </p:txBody>
-      </p:sp>
-      <p:sp>
-        <p:nvSpPr>
-          <p:cNvPr id="43" name="Text 41"/>
-          <p:cNvSpPr/>
-          <p:nvPr/>
-        </p:nvSpPr>
-        <p:spPr>
-          <a:xfrm>
-            <a:off x="5413248" y="4059936"/>
-            <a:ext cx="3474720" cy="274320"/>
-          </a:xfrm>
-          <a:prstGeom prst="rect">
-            <a:avLst/>
-          </a:prstGeom>
-          <a:noFill/>
-          <a:ln/>
-        </p:spPr>
-        <p:txBody>
-          <a:bodyPr wrap="square" lIns="0" tIns="0" rIns="0" bIns="0" rtlCol="0" anchor="ctr"/>
-          <a:lstStyle/>
-          <a:p>
-            <a:pPr marL="0" indent="0">
-              <a:buNone/>
-            </a:pPr>
-            <a:r>
-              <a:rPr lang="en-US" sz="1200" b="1" dirty="0">
-                <a:solidFill>
-                  <a:srgbClr val="0D4F4A"/>
-                </a:solidFill>
-              </a:rPr>
-              <a:t>注文フォームの state</a:t>
-            </a:r>
-            <a:endParaRPr lang="en-US" sz="1200" dirty="0"/>
-          </a:p>
-        </p:txBody>
-      </p:sp>
-      <p:sp>
-        <p:nvSpPr>
-          <p:cNvPr id="44" name="Text 42"/>
-          <p:cNvSpPr/>
-          <p:nvPr/>
-        </p:nvSpPr>
-        <p:spPr>
-          <a:xfrm>
-            <a:off x="5413248" y="4352544"/>
-            <a:ext cx="3474720" cy="256032"/>
-          </a:xfrm>
-          <a:prstGeom prst="rect">
-            <a:avLst/>
-          </a:prstGeom>
-          <a:noFill/>
-          <a:ln/>
-        </p:spPr>
-        <p:txBody>
-          <a:bodyPr wrap="square" lIns="0" tIns="0" rIns="0" bIns="0" rtlCol="0" anchor="ctr"/>
-          <a:lstStyle/>
-          <a:p>
-            <a:pPr marL="0" indent="0">
-              <a:buNone/>
-            </a:pPr>
+              <a:t>state </a:t>
+            </a:r>
+            <a:r>
+              <a:rPr lang="ja-JP" altLang="en-US" sz="1000">
+                <a:solidFill>
+                  <a:srgbClr val="6B7280"/>
+                </a:solidFill>
+                <a:latin typeface="Courier New" pitchFamily="34" charset="0"/>
+                <a:ea typeface="Courier New" pitchFamily="34" charset="-122"/>
+                <a:cs typeface="Courier New" pitchFamily="34" charset="-120"/>
+              </a:rPr>
+              <a:t>と </a:t>
+            </a:r>
+            <a:r>
+              <a:rPr lang="en-US" sz="1000" dirty="0" err="1">
+                <a:solidFill>
+                  <a:srgbClr val="6B7280"/>
+                </a:solidFill>
+                <a:latin typeface="Courier New" pitchFamily="34" charset="0"/>
+                <a:ea typeface="Courier New" pitchFamily="34" charset="-122"/>
+                <a:cs typeface="Courier New" pitchFamily="34" charset="-120"/>
+              </a:rPr>
+              <a:t>localStorage</a:t>
+            </a:r>
             <a:r>
               <a:rPr lang="en-US" sz="1000" dirty="0">
                 <a:solidFill>
@@ -13073,43 +13195,18 @@
                 <a:ea typeface="Courier New" pitchFamily="34" charset="-122"/>
                 <a:cs typeface="Courier New" pitchFamily="34" charset="-120"/>
               </a:rPr>
-              <a:t>controlled component</a:t>
-            </a:r>
-            <a:endParaRPr lang="en-US" sz="1000" dirty="0"/>
-          </a:p>
-        </p:txBody>
-      </p:sp>
-      <p:sp>
-        <p:nvSpPr>
-          <p:cNvPr id="45" name="Text 43"/>
-          <p:cNvSpPr/>
-          <p:nvPr/>
-        </p:nvSpPr>
-        <p:spPr>
-          <a:xfrm>
-            <a:off x="7772400" y="4754880"/>
-            <a:ext cx="1097280" cy="274320"/>
-          </a:xfrm>
-          <a:prstGeom prst="rect">
-            <a:avLst/>
-          </a:prstGeom>
-          <a:noFill/>
-          <a:ln/>
-        </p:spPr>
-        <p:txBody>
-          <a:bodyPr wrap="square" rtlCol="0" anchor="ctr"/>
-          <a:lstStyle/>
-          <a:p>
-            <a:pPr marL="0" indent="0" algn="r">
-              <a:buNone/>
-            </a:pPr>
-            <a:r>
-              <a:rPr lang="en-US" sz="1000" dirty="0">
+              <a:t> </a:t>
+            </a:r>
+            <a:r>
+              <a:rPr lang="ja-JP" altLang="en-US" sz="1000">
                 <a:solidFill>
                   <a:srgbClr val="6B7280"/>
                 </a:solidFill>
-              </a:rPr>
-              <a:t>17 / 18</a:t>
+                <a:latin typeface="Courier New" pitchFamily="34" charset="0"/>
+                <a:ea typeface="Courier New" pitchFamily="34" charset="-122"/>
+                <a:cs typeface="Courier New" pitchFamily="34" charset="-120"/>
+              </a:rPr>
+              <a:t>を読む</a:t>
             </a:r>
             <a:endParaRPr lang="en-US" sz="1000" dirty="0"/>
           </a:p>
